--- a/hcltech_strengthen_before_scale.pptx
+++ b/hcltech_strengthen_before_scale.pptx
@@ -2257,7 +2257,7 @@
                 </a:solidFill>
                 <a:latin typeface="Aptos"/>
               </a:rPr>
-              <a:t>Eight moves to define the organization — signed off before we launch.</a:t>
+              <a:t>Three phases, eight moves — then one launch decision.</a:t>
             </a:r>
           </a:p>
         </p:txBody>
@@ -2270,8 +2270,8 @@
         </p:nvSpPr>
         <p:spPr>
           <a:xfrm>
-            <a:off x="9509760" y="1280160"/>
-            <a:ext cx="2084831" cy="457200"/>
+            <a:off x="9710928" y="1243584"/>
+            <a:ext cx="1883664" cy="420624"/>
           </a:xfrm>
           <a:prstGeom prst="roundRect">
             <a:avLst>
@@ -2313,13 +2313,13 @@
               </a:spcAft>
             </a:pPr>
             <a:r>
-              <a:rPr sz="1400" b="1">
+              <a:rPr sz="1300" b="1">
                 <a:solidFill>
                   <a:srgbClr val="0F5FDC"/>
                 </a:solidFill>
                 <a:latin typeface="Aptos"/>
               </a:rPr>
-              <a:t>SCALE OUT</a:t>
+              <a:t>   SCALE OUT</a:t>
             </a:r>
           </a:p>
         </p:txBody>
@@ -2332,8 +2332,8 @@
         </p:nvSpPr>
         <p:spPr>
           <a:xfrm>
-            <a:off x="9747504" y="1399032"/>
-            <a:ext cx="201168" cy="219456"/>
+            <a:off x="9966960" y="1344168"/>
+            <a:ext cx="182880" cy="219456"/>
           </a:xfrm>
           <a:prstGeom prst="upArrow">
             <a:avLst>
@@ -2379,16 +2379,16 @@
         </p:nvSpPr>
         <p:spPr>
           <a:xfrm>
-            <a:off x="868680" y="5175504"/>
-            <a:ext cx="8595360" cy="438912"/>
+            <a:off x="594360" y="1883664"/>
+            <a:ext cx="3520440" cy="3602736"/>
           </a:xfrm>
           <a:prstGeom prst="roundRect">
             <a:avLst>
-              <a:gd name="adj" fmla="val 16000"/>
+              <a:gd name="adj" fmla="val 4500"/>
             </a:avLst>
           </a:prstGeom>
           <a:solidFill>
-            <a:srgbClr val="E6EBF5"/>
+            <a:srgbClr val="FFFFFF"/>
           </a:solidFill>
           <a:ln w="9525">
             <a:solidFill>
@@ -2421,63 +2421,20 @@
       </p:sp>
       <p:sp>
         <p:nvSpPr>
-          <p:cNvPr id="7" name="Rounded Rectangle 6"/>
+          <p:cNvPr id="7" name="Round Same Side Corner Rectangle 6"/>
           <p:cNvSpPr/>
           <p:nvPr/>
         </p:nvSpPr>
         <p:spPr>
           <a:xfrm>
-            <a:off x="868680" y="5175504"/>
-            <a:ext cx="64008" cy="438912"/>
-          </a:xfrm>
-          <a:prstGeom prst="roundRect">
+            <a:off x="594360" y="1883664"/>
+            <a:ext cx="3520440" cy="658368"/>
+          </a:xfrm>
+          <a:prstGeom prst="round2SameRect">
             <a:avLst>
-              <a:gd name="adj" fmla="val 50000"/>
+              <a:gd name="adj1" fmla="val 16000"/>
+              <a:gd name="adj2" fmla="val 0"/>
             </a:avLst>
-          </a:prstGeom>
-          <a:solidFill>
-            <a:srgbClr val="411482"/>
-          </a:solidFill>
-          <a:ln>
-            <a:noFill/>
-          </a:ln>
-          <a:effectLst/>
-        </p:spPr>
-        <p:style>
-          <a:lnRef idx="1">
-            <a:schemeClr val="accent1"/>
-          </a:lnRef>
-          <a:fillRef idx="3">
-            <a:schemeClr val="accent1"/>
-          </a:fillRef>
-          <a:effectRef idx="2">
-            <a:schemeClr val="accent1"/>
-          </a:effectRef>
-          <a:fontRef idx="minor">
-            <a:schemeClr val="lt1"/>
-          </a:fontRef>
-        </p:style>
-        <p:txBody>
-          <a:bodyPr rtlCol="0" anchor="ctr" wrap="square"/>
-          <a:lstStyle/>
-          <a:p>
-            <a:pPr algn="ctr"/>
-          </a:p>
-        </p:txBody>
-      </p:sp>
-      <p:sp>
-        <p:nvSpPr>
-          <p:cNvPr id="8" name="Oval 7"/>
-          <p:cNvSpPr/>
-          <p:nvPr/>
-        </p:nvSpPr>
-        <p:spPr>
-          <a:xfrm>
-            <a:off x="1033271" y="5239512"/>
-            <a:ext cx="310896" cy="310896"/>
-          </a:xfrm>
-          <a:prstGeom prst="ellipse">
-            <a:avLst/>
           </a:prstGeom>
           <a:solidFill>
             <a:srgbClr val="411482"/>
@@ -2514,27 +2471,228 @@
               </a:spcAft>
             </a:pPr>
             <a:r>
-              <a:rPr sz="1200" b="1">
+              <a:rPr sz="900" b="1">
+                <a:solidFill>
+                  <a:srgbClr val="B9C8FF"/>
+                </a:solidFill>
+                <a:latin typeface="Aptos"/>
+              </a:rPr>
+              <a:t>PHASE 1</a:t>
+            </a:r>
+          </a:p>
+          <a:p>
+            <a:pPr algn="ctr">
+              <a:lnSpc>
+                <a:spcPct val="98000"/>
+              </a:lnSpc>
+              <a:spcAft>
+                <a:spcPts val="0"/>
+              </a:spcAft>
+            </a:pPr>
+            <a:r>
+              <a:rPr sz="1500" b="1">
                 <a:solidFill>
                   <a:srgbClr val="FFFFFF"/>
                 </a:solidFill>
                 <a:latin typeface="Aptos"/>
               </a:rPr>
-              <a:t>1</a:t>
+              <a:t>Strengthen the core</a:t>
             </a:r>
           </a:p>
         </p:txBody>
       </p:sp>
       <p:sp>
         <p:nvSpPr>
-          <p:cNvPr id="9" name="TextBox 8"/>
+          <p:cNvPr id="8" name="Oval 7"/>
+          <p:cNvSpPr/>
+          <p:nvPr/>
+        </p:nvSpPr>
+        <p:spPr>
+          <a:xfrm>
+            <a:off x="868680" y="3090672"/>
+            <a:ext cx="420624" cy="420624"/>
+          </a:xfrm>
+          <a:prstGeom prst="ellipse">
+            <a:avLst/>
+          </a:prstGeom>
+          <a:solidFill>
+            <a:srgbClr val="E6EBF5"/>
+          </a:solidFill>
+          <a:ln>
+            <a:noFill/>
+          </a:ln>
+          <a:effectLst/>
+        </p:spPr>
+        <p:style>
+          <a:lnRef idx="1">
+            <a:schemeClr val="accent1"/>
+          </a:lnRef>
+          <a:fillRef idx="3">
+            <a:schemeClr val="accent1"/>
+          </a:fillRef>
+          <a:effectRef idx="2">
+            <a:schemeClr val="accent1"/>
+          </a:effectRef>
+          <a:fontRef idx="minor">
+            <a:schemeClr val="lt1"/>
+          </a:fontRef>
+        </p:style>
+        <p:txBody>
+          <a:bodyPr rtlCol="0" anchor="ctr" wrap="square"/>
+          <a:lstStyle/>
+          <a:p>
+            <a:pPr algn="ctr"/>
+          </a:p>
+        </p:txBody>
+      </p:sp>
+      <p:sp>
+        <p:nvSpPr>
+          <p:cNvPr id="9" name="Rounded Rectangle 8"/>
+          <p:cNvSpPr/>
+          <p:nvPr/>
+        </p:nvSpPr>
+        <p:spPr>
+          <a:xfrm>
+            <a:off x="1046073" y="3195645"/>
+            <a:ext cx="65836" cy="65836"/>
+          </a:xfrm>
+          <a:prstGeom prst="roundRect">
+            <a:avLst>
+              <a:gd name="adj" fmla="val 22000"/>
+            </a:avLst>
+          </a:prstGeom>
+          <a:solidFill>
+            <a:srgbClr val="411482"/>
+          </a:solidFill>
+          <a:ln>
+            <a:noFill/>
+          </a:ln>
+          <a:effectLst/>
+        </p:spPr>
+        <p:style>
+          <a:lnRef idx="1">
+            <a:schemeClr val="accent1"/>
+          </a:lnRef>
+          <a:fillRef idx="3">
+            <a:schemeClr val="accent1"/>
+          </a:fillRef>
+          <a:effectRef idx="2">
+            <a:schemeClr val="accent1"/>
+          </a:effectRef>
+          <a:fontRef idx="minor">
+            <a:schemeClr val="lt1"/>
+          </a:fontRef>
+        </p:style>
+        <p:txBody>
+          <a:bodyPr rtlCol="0" anchor="ctr" wrap="square"/>
+          <a:lstStyle/>
+          <a:p>
+            <a:pPr algn="ctr"/>
+          </a:p>
+        </p:txBody>
+      </p:sp>
+      <p:sp>
+        <p:nvSpPr>
+          <p:cNvPr id="10" name="Rounded Rectangle 9"/>
+          <p:cNvSpPr/>
+          <p:nvPr/>
+        </p:nvSpPr>
+        <p:spPr>
+          <a:xfrm>
+            <a:off x="995598" y="3309762"/>
+            <a:ext cx="65836" cy="65836"/>
+          </a:xfrm>
+          <a:prstGeom prst="roundRect">
+            <a:avLst>
+              <a:gd name="adj" fmla="val 22000"/>
+            </a:avLst>
+          </a:prstGeom>
+          <a:solidFill>
+            <a:srgbClr val="411482"/>
+          </a:solidFill>
+          <a:ln>
+            <a:noFill/>
+          </a:ln>
+          <a:effectLst/>
+        </p:spPr>
+        <p:style>
+          <a:lnRef idx="1">
+            <a:schemeClr val="accent1"/>
+          </a:lnRef>
+          <a:fillRef idx="3">
+            <a:schemeClr val="accent1"/>
+          </a:fillRef>
+          <a:effectRef idx="2">
+            <a:schemeClr val="accent1"/>
+          </a:effectRef>
+          <a:fontRef idx="minor">
+            <a:schemeClr val="lt1"/>
+          </a:fontRef>
+        </p:style>
+        <p:txBody>
+          <a:bodyPr rtlCol="0" anchor="ctr" wrap="square"/>
+          <a:lstStyle/>
+          <a:p>
+            <a:pPr algn="ctr"/>
+          </a:p>
+        </p:txBody>
+      </p:sp>
+      <p:sp>
+        <p:nvSpPr>
+          <p:cNvPr id="11" name="Rounded Rectangle 10"/>
+          <p:cNvSpPr/>
+          <p:nvPr/>
+        </p:nvSpPr>
+        <p:spPr>
+          <a:xfrm>
+            <a:off x="1096548" y="3309762"/>
+            <a:ext cx="65836" cy="65836"/>
+          </a:xfrm>
+          <a:prstGeom prst="roundRect">
+            <a:avLst>
+              <a:gd name="adj" fmla="val 22000"/>
+            </a:avLst>
+          </a:prstGeom>
+          <a:solidFill>
+            <a:srgbClr val="411482"/>
+          </a:solidFill>
+          <a:ln>
+            <a:noFill/>
+          </a:ln>
+          <a:effectLst/>
+        </p:spPr>
+        <p:style>
+          <a:lnRef idx="1">
+            <a:schemeClr val="accent1"/>
+          </a:lnRef>
+          <a:fillRef idx="3">
+            <a:schemeClr val="accent1"/>
+          </a:fillRef>
+          <a:effectRef idx="2">
+            <a:schemeClr val="accent1"/>
+          </a:effectRef>
+          <a:fontRef idx="minor">
+            <a:schemeClr val="lt1"/>
+          </a:fontRef>
+        </p:style>
+        <p:txBody>
+          <a:bodyPr rtlCol="0" anchor="ctr" wrap="square"/>
+          <a:lstStyle/>
+          <a:p>
+            <a:pPr algn="ctr"/>
+          </a:p>
+        </p:txBody>
+      </p:sp>
+      <p:sp>
+        <p:nvSpPr>
+          <p:cNvPr id="12" name="TextBox 11"/>
           <p:cNvSpPr txBox="1"/>
           <p:nvPr/>
         </p:nvSpPr>
         <p:spPr>
           <a:xfrm>
-            <a:off x="1453895" y="5175504"/>
-            <a:ext cx="2560320" cy="438912"/>
+            <a:off x="1435608" y="3035808"/>
+            <a:ext cx="2404872" cy="530352"/>
           </a:xfrm>
           <a:prstGeom prst="rect">
             <a:avLst/>
@@ -2548,32 +2706,88 @@
           <a:lstStyle/>
           <a:p>
             <a:pPr algn="l">
+              <a:lnSpc>
+                <a:spcPct val="110000"/>
+              </a:lnSpc>
               <a:spcAft>
                 <a:spcPts val="0"/>
               </a:spcAft>
             </a:pPr>
             <a:r>
-              <a:rPr sz="1050" b="1">
+              <a:rPr sz="1000" b="1">
                 <a:solidFill>
                   <a:srgbClr val="411482"/>
                 </a:solidFill>
                 <a:latin typeface="Aptos"/>
               </a:rPr>
-              <a:t>Strengthen capability units</a:t>
+              <a:t>1   </a:t>
             </a:r>
-          </a:p>
-        </p:txBody>
-      </p:sp>
-      <p:sp>
-        <p:nvSpPr>
-          <p:cNvPr id="10" name="Freeform 9"/>
+            <a:r>
+              <a:rPr sz="1150" b="1">
+                <a:solidFill>
+                  <a:srgbClr val="000000"/>
+                </a:solidFill>
+                <a:latin typeface="Aptos"/>
+              </a:rPr>
+              <a:t>Capability units, first time</a:t>
+            </a:r>
+          </a:p>
+        </p:txBody>
+      </p:sp>
+      <p:sp>
+        <p:nvSpPr>
+          <p:cNvPr id="13" name="Oval 12"/>
           <p:cNvSpPr/>
           <p:nvPr/>
         </p:nvSpPr>
         <p:spPr>
           <a:xfrm>
-            <a:off x="4069080" y="5266944"/>
-            <a:ext cx="0" cy="256032"/>
+            <a:off x="868680" y="3749039"/>
+            <a:ext cx="420624" cy="420624"/>
+          </a:xfrm>
+          <a:prstGeom prst="ellipse">
+            <a:avLst/>
+          </a:prstGeom>
+          <a:solidFill>
+            <a:srgbClr val="E6EBF5"/>
+          </a:solidFill>
+          <a:ln>
+            <a:noFill/>
+          </a:ln>
+          <a:effectLst/>
+        </p:spPr>
+        <p:style>
+          <a:lnRef idx="1">
+            <a:schemeClr val="accent1"/>
+          </a:lnRef>
+          <a:fillRef idx="3">
+            <a:schemeClr val="accent1"/>
+          </a:fillRef>
+          <a:effectRef idx="2">
+            <a:schemeClr val="accent1"/>
+          </a:effectRef>
+          <a:fontRef idx="minor">
+            <a:schemeClr val="lt1"/>
+          </a:fontRef>
+        </p:style>
+        <p:txBody>
+          <a:bodyPr rtlCol="0" anchor="ctr" wrap="square"/>
+          <a:lstStyle/>
+          <a:p>
+            <a:pPr algn="ctr"/>
+          </a:p>
+        </p:txBody>
+      </p:sp>
+      <p:sp>
+        <p:nvSpPr>
+          <p:cNvPr id="14" name="Freeform 13"/>
+          <p:cNvSpPr/>
+          <p:nvPr/>
+        </p:nvSpPr>
+        <p:spPr>
+          <a:xfrm>
+            <a:off x="991209" y="3854013"/>
+            <a:ext cx="175565" cy="219456"/>
           </a:xfrm>
           <a:custGeom>
             <a:avLst/>
@@ -2582,12 +2796,131 @@
             <a:cxnLst/>
             <a:rect l="l" t="t" r="r" b="b"/>
             <a:pathLst>
-              <a:path w="0" h="256032">
+              <a:path w="175565" h="219456">
                 <a:moveTo>
                   <a:pt x="0" y="0"/>
                 </a:moveTo>
                 <a:lnTo>
-                  <a:pt x="0" y="256032"/>
+                  <a:pt x="175565" y="0"/>
+                </a:lnTo>
+                <a:lnTo>
+                  <a:pt x="175565" y="118506"/>
+                </a:lnTo>
+                <a:lnTo>
+                  <a:pt x="87783" y="219456"/>
+                </a:lnTo>
+                <a:lnTo>
+                  <a:pt x="0" y="118506"/>
+                </a:lnTo>
+                <a:close/>
+              </a:path>
+            </a:pathLst>
+          </a:custGeom>
+          <a:noFill/>
+          <a:ln w="12700">
+            <a:solidFill>
+              <a:srgbClr val="411482"/>
+            </a:solidFill>
+          </a:ln>
+          <a:effectLst/>
+        </p:spPr>
+        <p:style>
+          <a:lnRef idx="1">
+            <a:schemeClr val="accent1"/>
+          </a:lnRef>
+          <a:fillRef idx="3">
+            <a:schemeClr val="accent1"/>
+          </a:fillRef>
+          <a:effectRef idx="2">
+            <a:schemeClr val="accent1"/>
+          </a:effectRef>
+          <a:fontRef idx="minor">
+            <a:schemeClr val="lt1"/>
+          </a:fontRef>
+        </p:style>
+        <p:txBody>
+          <a:bodyPr rtlCol="0" anchor="ctr"/>
+          <a:lstStyle/>
+          <a:p>
+            <a:pPr algn="ctr"/>
+          </a:p>
+        </p:txBody>
+      </p:sp>
+      <p:sp>
+        <p:nvSpPr>
+          <p:cNvPr id="15" name="TextBox 14"/>
+          <p:cNvSpPr txBox="1"/>
+          <p:nvPr/>
+        </p:nvSpPr>
+        <p:spPr>
+          <a:xfrm>
+            <a:off x="1435608" y="3694176"/>
+            <a:ext cx="2404872" cy="530352"/>
+          </a:xfrm>
+          <a:prstGeom prst="rect">
+            <a:avLst/>
+          </a:prstGeom>
+          <a:noFill/>
+        </p:spPr>
+        <p:txBody>
+          <a:bodyPr wrap="square" lIns="0" rIns="0" tIns="0" bIns="0" anchor="ctr">
+            <a:spAutoFit/>
+          </a:bodyPr>
+          <a:lstStyle/>
+          <a:p>
+            <a:pPr algn="l">
+              <a:lnSpc>
+                <a:spcPct val="110000"/>
+              </a:lnSpc>
+              <a:spcAft>
+                <a:spcPts val="0"/>
+              </a:spcAft>
+            </a:pPr>
+            <a:r>
+              <a:rPr sz="1000" b="1">
+                <a:solidFill>
+                  <a:srgbClr val="411482"/>
+                </a:solidFill>
+                <a:latin typeface="Aptos"/>
+              </a:rPr>
+              <a:t>2   </a:t>
+            </a:r>
+            <a:r>
+              <a:rPr sz="1150" b="1">
+                <a:solidFill>
+                  <a:srgbClr val="000000"/>
+                </a:solidFill>
+                <a:latin typeface="Aptos"/>
+              </a:rPr>
+              <a:t>Transition and quality</a:t>
+            </a:r>
+          </a:p>
+        </p:txBody>
+      </p:sp>
+      <p:sp>
+        <p:nvSpPr>
+          <p:cNvPr id="16" name="Freeform 15"/>
+          <p:cNvSpPr/>
+          <p:nvPr/>
+        </p:nvSpPr>
+        <p:spPr>
+          <a:xfrm>
+            <a:off x="868680" y="4754880"/>
+            <a:ext cx="2971800" cy="0"/>
+          </a:xfrm>
+          <a:custGeom>
+            <a:avLst/>
+            <a:gdLst/>
+            <a:ahLst/>
+            <a:cxnLst/>
+            <a:rect l="l" t="t" r="r" b="b"/>
+            <a:pathLst>
+              <a:path w="2971800" h="0">
+                <a:moveTo>
+                  <a:pt x="0" y="0"/>
+                </a:moveTo>
+                <a:lnTo>
+                  <a:pt x="2971800" y="0"/>
                 </a:lnTo>
               </a:path>
             </a:pathLst>
@@ -2595,7 +2928,7 @@
           <a:noFill/>
           <a:ln w="9525">
             <a:solidFill>
-              <a:srgbClr val="C8D2DD"/>
+              <a:srgbClr val="E6EBF5"/>
             </a:solidFill>
           </a:ln>
           <a:effectLst/>
@@ -2624,17 +2957,61 @@
       </p:sp>
       <p:sp>
         <p:nvSpPr>
-          <p:cNvPr id="11" name="Oval 10"/>
+          <p:cNvPr id="17" name="TextBox 16"/>
+          <p:cNvSpPr txBox="1"/>
+          <p:nvPr/>
+        </p:nvSpPr>
+        <p:spPr>
+          <a:xfrm>
+            <a:off x="868680" y="4882896"/>
+            <a:ext cx="2971800" cy="402336"/>
+          </a:xfrm>
+          <a:prstGeom prst="rect">
+            <a:avLst/>
+          </a:prstGeom>
+          <a:noFill/>
+        </p:spPr>
+        <p:txBody>
+          <a:bodyPr wrap="square" lIns="0" rIns="0" tIns="0" bIns="0" anchor="ctr">
+            <a:spAutoFit/>
+          </a:bodyPr>
+          <a:lstStyle/>
+          <a:p>
+            <a:pPr algn="l">
+              <a:lnSpc>
+                <a:spcPct val="110000"/>
+              </a:lnSpc>
+              <a:spcAft>
+                <a:spcPts val="0"/>
+              </a:spcAft>
+            </a:pPr>
+            <a:r>
+              <a:rPr sz="1050" b="0">
+                <a:solidFill>
+                  <a:srgbClr val="411482"/>
+                </a:solidFill>
+                <a:latin typeface="Aptos"/>
+              </a:rPr>
+              <a:t>Delivery quality becomes dependable</a:t>
+            </a:r>
+          </a:p>
+        </p:txBody>
+      </p:sp>
+      <p:sp>
+        <p:nvSpPr>
+          <p:cNvPr id="18" name="Rounded Rectangle 17"/>
           <p:cNvSpPr/>
           <p:nvPr/>
         </p:nvSpPr>
         <p:spPr>
           <a:xfrm>
-            <a:off x="4215384" y="5257800"/>
-            <a:ext cx="274320" cy="274320"/>
-          </a:xfrm>
-          <a:prstGeom prst="ellipse">
-            <a:avLst/>
+            <a:off x="4334256" y="1883664"/>
+            <a:ext cx="3520440" cy="3602736"/>
+          </a:xfrm>
+          <a:prstGeom prst="roundRect">
+            <a:avLst>
+              <a:gd name="adj" fmla="val 4500"/>
+            </a:avLst>
           </a:prstGeom>
           <a:solidFill>
             <a:srgbClr val="FFFFFF"/>
@@ -2670,22 +3047,23 @@
       </p:sp>
       <p:sp>
         <p:nvSpPr>
-          <p:cNvPr id="12" name="Rounded Rectangle 11"/>
+          <p:cNvPr id="19" name="Round Same Side Corner Rectangle 18"/>
           <p:cNvSpPr/>
           <p:nvPr/>
         </p:nvSpPr>
         <p:spPr>
           <a:xfrm>
-            <a:off x="4329226" y="5320344"/>
-            <a:ext cx="46634" cy="46634"/>
-          </a:xfrm>
-          <a:prstGeom prst="roundRect">
+            <a:off x="4334256" y="1883664"/>
+            <a:ext cx="3520440" cy="658368"/>
+          </a:xfrm>
+          <a:prstGeom prst="round2SameRect">
             <a:avLst>
-              <a:gd name="adj" fmla="val 22000"/>
+              <a:gd name="adj1" fmla="val 16000"/>
+              <a:gd name="adj2" fmla="val 0"/>
             </a:avLst>
           </a:prstGeom>
           <a:solidFill>
-            <a:srgbClr val="411482"/>
+            <a:srgbClr val="5F1EBE"/>
           </a:solidFill>
           <a:ln>
             <a:noFill/>
@@ -2707,31 +3085,64 @@
           </a:fontRef>
         </p:style>
         <p:txBody>
-          <a:bodyPr rtlCol="0" anchor="ctr" wrap="square"/>
-          <a:lstStyle/>
-          <a:p>
-            <a:pPr algn="ctr"/>
-          </a:p>
-        </p:txBody>
-      </p:sp>
-      <p:sp>
-        <p:nvSpPr>
-          <p:cNvPr id="13" name="Rounded Rectangle 12"/>
+          <a:bodyPr rtlCol="0" anchor="ctr" wrap="square" lIns="54864" rIns="54864" tIns="0" bIns="0"/>
+          <a:lstStyle/>
+          <a:p>
+            <a:pPr algn="ctr">
+              <a:lnSpc>
+                <a:spcPct val="98000"/>
+              </a:lnSpc>
+              <a:spcAft>
+                <a:spcPts val="0"/>
+              </a:spcAft>
+            </a:pPr>
+            <a:r>
+              <a:rPr sz="900" b="1">
+                <a:solidFill>
+                  <a:srgbClr val="B9C8FF"/>
+                </a:solidFill>
+                <a:latin typeface="Aptos"/>
+              </a:rPr>
+              <a:t>PHASE 2</a:t>
+            </a:r>
+          </a:p>
+          <a:p>
+            <a:pPr algn="ctr">
+              <a:lnSpc>
+                <a:spcPct val="98000"/>
+              </a:lnSpc>
+              <a:spcAft>
+                <a:spcPts val="0"/>
+              </a:spcAft>
+            </a:pPr>
+            <a:r>
+              <a:rPr sz="1500" b="1">
+                <a:solidFill>
+                  <a:srgbClr val="FFFFFF"/>
+                </a:solidFill>
+                <a:latin typeface="Aptos"/>
+              </a:rPr>
+              <a:t>Simplify the structure</a:t>
+            </a:r>
+          </a:p>
+        </p:txBody>
+      </p:sp>
+      <p:sp>
+        <p:nvSpPr>
+          <p:cNvPr id="20" name="Oval 19"/>
           <p:cNvSpPr/>
           <p:nvPr/>
         </p:nvSpPr>
         <p:spPr>
           <a:xfrm>
-            <a:off x="4293473" y="5401177"/>
-            <a:ext cx="46634" cy="46634"/>
-          </a:xfrm>
-          <a:prstGeom prst="roundRect">
-            <a:avLst>
-              <a:gd name="adj" fmla="val 22000"/>
-            </a:avLst>
+            <a:off x="4608576" y="2761488"/>
+            <a:ext cx="420624" cy="420624"/>
+          </a:xfrm>
+          <a:prstGeom prst="ellipse">
+            <a:avLst/>
           </a:prstGeom>
           <a:solidFill>
-            <a:srgbClr val="411482"/>
+            <a:srgbClr val="E6EBF5"/>
           </a:solidFill>
           <a:ln>
             <a:noFill/>
@@ -2762,22 +3173,20 @@
       </p:sp>
       <p:sp>
         <p:nvSpPr>
-          <p:cNvPr id="14" name="Rounded Rectangle 13"/>
+          <p:cNvPr id="21" name="Diamond 20"/>
           <p:cNvSpPr/>
           <p:nvPr/>
         </p:nvSpPr>
         <p:spPr>
           <a:xfrm>
-            <a:off x="4364979" y="5401177"/>
-            <a:ext cx="46634" cy="46634"/>
-          </a:xfrm>
-          <a:prstGeom prst="roundRect">
-            <a:avLst>
-              <a:gd name="adj" fmla="val 22000"/>
-            </a:avLst>
+            <a:off x="4722327" y="2877433"/>
+            <a:ext cx="193121" cy="57058"/>
+          </a:xfrm>
+          <a:prstGeom prst="diamond">
+            <a:avLst/>
           </a:prstGeom>
           <a:solidFill>
-            <a:srgbClr val="411482"/>
+            <a:srgbClr val="5F1EBE"/>
           </a:solidFill>
           <a:ln>
             <a:noFill/>
@@ -2808,14 +3217,102 @@
       </p:sp>
       <p:sp>
         <p:nvSpPr>
-          <p:cNvPr id="15" name="TextBox 14"/>
+          <p:cNvPr id="22" name="Diamond 21"/>
+          <p:cNvSpPr/>
+          <p:nvPr/>
+        </p:nvSpPr>
+        <p:spPr>
+          <a:xfrm>
+            <a:off x="4722327" y="2938881"/>
+            <a:ext cx="193121" cy="57058"/>
+          </a:xfrm>
+          <a:prstGeom prst="diamond">
+            <a:avLst/>
+          </a:prstGeom>
+          <a:noFill/>
+          <a:ln w="12700">
+            <a:solidFill>
+              <a:srgbClr val="5F1EBE"/>
+            </a:solidFill>
+          </a:ln>
+          <a:effectLst/>
+        </p:spPr>
+        <p:style>
+          <a:lnRef idx="1">
+            <a:schemeClr val="accent1"/>
+          </a:lnRef>
+          <a:fillRef idx="3">
+            <a:schemeClr val="accent1"/>
+          </a:fillRef>
+          <a:effectRef idx="2">
+            <a:schemeClr val="accent1"/>
+          </a:effectRef>
+          <a:fontRef idx="minor">
+            <a:schemeClr val="lt1"/>
+          </a:fontRef>
+        </p:style>
+        <p:txBody>
+          <a:bodyPr rtlCol="0" anchor="ctr" wrap="square"/>
+          <a:lstStyle/>
+          <a:p>
+            <a:pPr algn="ctr"/>
+          </a:p>
+        </p:txBody>
+      </p:sp>
+      <p:sp>
+        <p:nvSpPr>
+          <p:cNvPr id="23" name="Diamond 22"/>
+          <p:cNvSpPr/>
+          <p:nvPr/>
+        </p:nvSpPr>
+        <p:spPr>
+          <a:xfrm>
+            <a:off x="4722327" y="3000329"/>
+            <a:ext cx="193121" cy="57058"/>
+          </a:xfrm>
+          <a:prstGeom prst="diamond">
+            <a:avLst/>
+          </a:prstGeom>
+          <a:noFill/>
+          <a:ln w="12700">
+            <a:solidFill>
+              <a:srgbClr val="5F1EBE"/>
+            </a:solidFill>
+          </a:ln>
+          <a:effectLst/>
+        </p:spPr>
+        <p:style>
+          <a:lnRef idx="1">
+            <a:schemeClr val="accent1"/>
+          </a:lnRef>
+          <a:fillRef idx="3">
+            <a:schemeClr val="accent1"/>
+          </a:fillRef>
+          <a:effectRef idx="2">
+            <a:schemeClr val="accent1"/>
+          </a:effectRef>
+          <a:fontRef idx="minor">
+            <a:schemeClr val="lt1"/>
+          </a:fontRef>
+        </p:style>
+        <p:txBody>
+          <a:bodyPr rtlCol="0" anchor="ctr" wrap="square"/>
+          <a:lstStyle/>
+          <a:p>
+            <a:pPr algn="ctr"/>
+          </a:p>
+        </p:txBody>
+      </p:sp>
+      <p:sp>
+        <p:nvSpPr>
+          <p:cNvPr id="24" name="TextBox 23"/>
           <p:cNvSpPr txBox="1"/>
           <p:nvPr/>
         </p:nvSpPr>
         <p:spPr>
           <a:xfrm>
-            <a:off x="4617720" y="5175504"/>
-            <a:ext cx="4663440" cy="438912"/>
+            <a:off x="5175504" y="2706624"/>
+            <a:ext cx="2404872" cy="530352"/>
           </a:xfrm>
           <a:prstGeom prst="rect">
             <a:avLst/>
@@ -2829,36 +3326,743 @@
           <a:lstStyle/>
           <a:p>
             <a:pPr algn="l">
+              <a:lnSpc>
+                <a:spcPct val="110000"/>
+              </a:lnSpc>
               <a:spcAft>
                 <a:spcPts val="0"/>
               </a:spcAft>
             </a:pPr>
             <a:r>
-              <a:rPr sz="950" b="0">
+              <a:rPr sz="1000" b="1">
+                <a:solidFill>
+                  <a:srgbClr val="5F1EBE"/>
+                </a:solidFill>
+                <a:latin typeface="Aptos"/>
+              </a:rPr>
+              <a:t>3   </a:t>
+            </a:r>
+            <a:r>
+              <a:rPr sz="1150" b="1">
                 <a:solidFill>
                   <a:srgbClr val="000000"/>
                 </a:solidFill>
                 <a:latin typeface="Aptos"/>
               </a:rPr>
-              <a:t>Build differentiated capabilities and functional depth</a:t>
+              <a:t>Delayering — fewer layers</a:t>
             </a:r>
           </a:p>
         </p:txBody>
       </p:sp>
       <p:sp>
         <p:nvSpPr>
-          <p:cNvPr id="16" name="Rounded Rectangle 15"/>
+          <p:cNvPr id="25" name="Oval 24"/>
           <p:cNvSpPr/>
           <p:nvPr/>
         </p:nvSpPr>
         <p:spPr>
           <a:xfrm>
-            <a:off x="1143000" y="4700016"/>
-            <a:ext cx="8595360" cy="438912"/>
+            <a:off x="4608576" y="3419856"/>
+            <a:ext cx="420624" cy="420624"/>
+          </a:xfrm>
+          <a:prstGeom prst="ellipse">
+            <a:avLst/>
+          </a:prstGeom>
+          <a:solidFill>
+            <a:srgbClr val="E6EBF5"/>
+          </a:solidFill>
+          <a:ln>
+            <a:noFill/>
+          </a:ln>
+          <a:effectLst/>
+        </p:spPr>
+        <p:style>
+          <a:lnRef idx="1">
+            <a:schemeClr val="accent1"/>
+          </a:lnRef>
+          <a:fillRef idx="3">
+            <a:schemeClr val="accent1"/>
+          </a:fillRef>
+          <a:effectRef idx="2">
+            <a:schemeClr val="accent1"/>
+          </a:effectRef>
+          <a:fontRef idx="minor">
+            <a:schemeClr val="lt1"/>
+          </a:fontRef>
+        </p:style>
+        <p:txBody>
+          <a:bodyPr rtlCol="0" anchor="ctr" wrap="square"/>
+          <a:lstStyle/>
+          <a:p>
+            <a:pPr algn="ctr"/>
+          </a:p>
+        </p:txBody>
+      </p:sp>
+      <p:sp>
+        <p:nvSpPr>
+          <p:cNvPr id="26" name="Oval 25"/>
+          <p:cNvSpPr/>
+          <p:nvPr/>
+        </p:nvSpPr>
+        <p:spPr>
+          <a:xfrm>
+            <a:off x="4793650" y="3529218"/>
+            <a:ext cx="50474" cy="50474"/>
+          </a:xfrm>
+          <a:prstGeom prst="ellipse">
+            <a:avLst/>
+          </a:prstGeom>
+          <a:noFill/>
+          <a:ln w="12700">
+            <a:solidFill>
+              <a:srgbClr val="5F1EBE"/>
+            </a:solidFill>
+          </a:ln>
+          <a:effectLst/>
+        </p:spPr>
+        <p:style>
+          <a:lnRef idx="1">
+            <a:schemeClr val="accent1"/>
+          </a:lnRef>
+          <a:fillRef idx="3">
+            <a:schemeClr val="accent1"/>
+          </a:fillRef>
+          <a:effectRef idx="2">
+            <a:schemeClr val="accent1"/>
+          </a:effectRef>
+          <a:fontRef idx="minor">
+            <a:schemeClr val="lt1"/>
+          </a:fontRef>
+        </p:style>
+        <p:txBody>
+          <a:bodyPr rtlCol="0" anchor="ctr" wrap="square"/>
+          <a:lstStyle/>
+          <a:p>
+            <a:pPr algn="ctr"/>
+          </a:p>
+        </p:txBody>
+      </p:sp>
+      <p:sp>
+        <p:nvSpPr>
+          <p:cNvPr id="27" name="Round Same Side Corner Rectangle 26"/>
+          <p:cNvSpPr/>
+          <p:nvPr/>
+        </p:nvSpPr>
+        <p:spPr>
+          <a:xfrm>
+            <a:off x="4772802" y="3595055"/>
+            <a:ext cx="92171" cy="74615"/>
+          </a:xfrm>
+          <a:prstGeom prst="round2SameRect">
+            <a:avLst>
+              <a:gd name="adj1" fmla="val 48000"/>
+              <a:gd name="adj2" fmla="val 0"/>
+            </a:avLst>
+          </a:prstGeom>
+          <a:noFill/>
+          <a:ln w="12700">
+            <a:solidFill>
+              <a:srgbClr val="5F1EBE"/>
+            </a:solidFill>
+          </a:ln>
+          <a:effectLst/>
+        </p:spPr>
+        <p:style>
+          <a:lnRef idx="1">
+            <a:schemeClr val="accent1"/>
+          </a:lnRef>
+          <a:fillRef idx="3">
+            <a:schemeClr val="accent1"/>
+          </a:fillRef>
+          <a:effectRef idx="2">
+            <a:schemeClr val="accent1"/>
+          </a:effectRef>
+          <a:fontRef idx="minor">
+            <a:schemeClr val="lt1"/>
+          </a:fontRef>
+        </p:style>
+        <p:txBody>
+          <a:bodyPr rtlCol="0" anchor="ctr" wrap="square"/>
+          <a:lstStyle/>
+          <a:p>
+            <a:pPr algn="ctr"/>
+          </a:p>
+        </p:txBody>
+      </p:sp>
+      <p:sp>
+        <p:nvSpPr>
+          <p:cNvPr id="28" name="Oval 27"/>
+          <p:cNvSpPr/>
+          <p:nvPr/>
+        </p:nvSpPr>
+        <p:spPr>
+          <a:xfrm>
+            <a:off x="4722327" y="3546774"/>
+            <a:ext cx="41696" cy="41696"/>
+          </a:xfrm>
+          <a:prstGeom prst="ellipse">
+            <a:avLst/>
+          </a:prstGeom>
+          <a:noFill/>
+          <a:ln w="12700">
+            <a:solidFill>
+              <a:srgbClr val="5F1EBE"/>
+            </a:solidFill>
+          </a:ln>
+          <a:effectLst/>
+        </p:spPr>
+        <p:style>
+          <a:lnRef idx="1">
+            <a:schemeClr val="accent1"/>
+          </a:lnRef>
+          <a:fillRef idx="3">
+            <a:schemeClr val="accent1"/>
+          </a:fillRef>
+          <a:effectRef idx="2">
+            <a:schemeClr val="accent1"/>
+          </a:effectRef>
+          <a:fontRef idx="minor">
+            <a:schemeClr val="lt1"/>
+          </a:fontRef>
+        </p:style>
+        <p:txBody>
+          <a:bodyPr rtlCol="0" anchor="ctr" wrap="square"/>
+          <a:lstStyle/>
+          <a:p>
+            <a:pPr algn="ctr"/>
+          </a:p>
+        </p:txBody>
+      </p:sp>
+      <p:sp>
+        <p:nvSpPr>
+          <p:cNvPr id="29" name="Round Same Side Corner Rectangle 28"/>
+          <p:cNvSpPr/>
+          <p:nvPr/>
+        </p:nvSpPr>
+        <p:spPr>
+          <a:xfrm>
+            <a:off x="4713549" y="3608222"/>
+            <a:ext cx="59253" cy="61447"/>
+          </a:xfrm>
+          <a:prstGeom prst="round2SameRect">
+            <a:avLst>
+              <a:gd name="adj1" fmla="val 48000"/>
+              <a:gd name="adj2" fmla="val 0"/>
+            </a:avLst>
+          </a:prstGeom>
+          <a:noFill/>
+          <a:ln w="12700">
+            <a:solidFill>
+              <a:srgbClr val="5F1EBE"/>
+            </a:solidFill>
+          </a:ln>
+          <a:effectLst/>
+        </p:spPr>
+        <p:style>
+          <a:lnRef idx="1">
+            <a:schemeClr val="accent1"/>
+          </a:lnRef>
+          <a:fillRef idx="3">
+            <a:schemeClr val="accent1"/>
+          </a:fillRef>
+          <a:effectRef idx="2">
+            <a:schemeClr val="accent1"/>
+          </a:effectRef>
+          <a:fontRef idx="minor">
+            <a:schemeClr val="lt1"/>
+          </a:fontRef>
+        </p:style>
+        <p:txBody>
+          <a:bodyPr rtlCol="0" anchor="ctr" wrap="square"/>
+          <a:lstStyle/>
+          <a:p>
+            <a:pPr algn="ctr"/>
+          </a:p>
+        </p:txBody>
+      </p:sp>
+      <p:sp>
+        <p:nvSpPr>
+          <p:cNvPr id="30" name="Oval 29"/>
+          <p:cNvSpPr/>
+          <p:nvPr/>
+        </p:nvSpPr>
+        <p:spPr>
+          <a:xfrm>
+            <a:off x="4873752" y="3546774"/>
+            <a:ext cx="41696" cy="41696"/>
+          </a:xfrm>
+          <a:prstGeom prst="ellipse">
+            <a:avLst/>
+          </a:prstGeom>
+          <a:noFill/>
+          <a:ln w="12700">
+            <a:solidFill>
+              <a:srgbClr val="5F1EBE"/>
+            </a:solidFill>
+          </a:ln>
+          <a:effectLst/>
+        </p:spPr>
+        <p:style>
+          <a:lnRef idx="1">
+            <a:schemeClr val="accent1"/>
+          </a:lnRef>
+          <a:fillRef idx="3">
+            <a:schemeClr val="accent1"/>
+          </a:fillRef>
+          <a:effectRef idx="2">
+            <a:schemeClr val="accent1"/>
+          </a:effectRef>
+          <a:fontRef idx="minor">
+            <a:schemeClr val="lt1"/>
+          </a:fontRef>
+        </p:style>
+        <p:txBody>
+          <a:bodyPr rtlCol="0" anchor="ctr" wrap="square"/>
+          <a:lstStyle/>
+          <a:p>
+            <a:pPr algn="ctr"/>
+          </a:p>
+        </p:txBody>
+      </p:sp>
+      <p:sp>
+        <p:nvSpPr>
+          <p:cNvPr id="31" name="Round Same Side Corner Rectangle 30"/>
+          <p:cNvSpPr/>
+          <p:nvPr/>
+        </p:nvSpPr>
+        <p:spPr>
+          <a:xfrm>
+            <a:off x="4864973" y="3608222"/>
+            <a:ext cx="59253" cy="61447"/>
+          </a:xfrm>
+          <a:prstGeom prst="round2SameRect">
+            <a:avLst>
+              <a:gd name="adj1" fmla="val 48000"/>
+              <a:gd name="adj2" fmla="val 0"/>
+            </a:avLst>
+          </a:prstGeom>
+          <a:noFill/>
+          <a:ln w="12700">
+            <a:solidFill>
+              <a:srgbClr val="5F1EBE"/>
+            </a:solidFill>
+          </a:ln>
+          <a:effectLst/>
+        </p:spPr>
+        <p:style>
+          <a:lnRef idx="1">
+            <a:schemeClr val="accent1"/>
+          </a:lnRef>
+          <a:fillRef idx="3">
+            <a:schemeClr val="accent1"/>
+          </a:fillRef>
+          <a:effectRef idx="2">
+            <a:schemeClr val="accent1"/>
+          </a:effectRef>
+          <a:fontRef idx="minor">
+            <a:schemeClr val="lt1"/>
+          </a:fontRef>
+        </p:style>
+        <p:txBody>
+          <a:bodyPr rtlCol="0" anchor="ctr" wrap="square"/>
+          <a:lstStyle/>
+          <a:p>
+            <a:pPr algn="ctr"/>
+          </a:p>
+        </p:txBody>
+      </p:sp>
+      <p:sp>
+        <p:nvSpPr>
+          <p:cNvPr id="32" name="TextBox 31"/>
+          <p:cNvSpPr txBox="1"/>
+          <p:nvPr/>
+        </p:nvSpPr>
+        <p:spPr>
+          <a:xfrm>
+            <a:off x="5175504" y="3364991"/>
+            <a:ext cx="2404872" cy="530352"/>
+          </a:xfrm>
+          <a:prstGeom prst="rect">
+            <a:avLst/>
+          </a:prstGeom>
+          <a:noFill/>
+        </p:spPr>
+        <p:txBody>
+          <a:bodyPr wrap="square" lIns="0" rIns="0" tIns="0" bIns="0" anchor="ctr">
+            <a:spAutoFit/>
+          </a:bodyPr>
+          <a:lstStyle/>
+          <a:p>
+            <a:pPr algn="l">
+              <a:lnSpc>
+                <a:spcPct val="110000"/>
+              </a:lnSpc>
+              <a:spcAft>
+                <a:spcPts val="0"/>
+              </a:spcAft>
+            </a:pPr>
+            <a:r>
+              <a:rPr sz="1000" b="1">
+                <a:solidFill>
+                  <a:srgbClr val="5F1EBE"/>
+                </a:solidFill>
+                <a:latin typeface="Aptos"/>
+              </a:rPr>
+              <a:t>4   </a:t>
+            </a:r>
+            <a:r>
+              <a:rPr sz="1150" b="1">
+                <a:solidFill>
+                  <a:srgbClr val="000000"/>
+                </a:solidFill>
+                <a:latin typeface="Aptos"/>
+              </a:rPr>
+              <a:t>Span of control</a:t>
+            </a:r>
+          </a:p>
+        </p:txBody>
+      </p:sp>
+      <p:sp>
+        <p:nvSpPr>
+          <p:cNvPr id="33" name="Oval 32"/>
+          <p:cNvSpPr/>
+          <p:nvPr/>
+        </p:nvSpPr>
+        <p:spPr>
+          <a:xfrm>
+            <a:off x="4608576" y="4078224"/>
+            <a:ext cx="420624" cy="420624"/>
+          </a:xfrm>
+          <a:prstGeom prst="ellipse">
+            <a:avLst/>
+          </a:prstGeom>
+          <a:solidFill>
+            <a:srgbClr val="E6EBF5"/>
+          </a:solidFill>
+          <a:ln>
+            <a:noFill/>
+          </a:ln>
+          <a:effectLst/>
+        </p:spPr>
+        <p:style>
+          <a:lnRef idx="1">
+            <a:schemeClr val="accent1"/>
+          </a:lnRef>
+          <a:fillRef idx="3">
+            <a:schemeClr val="accent1"/>
+          </a:fillRef>
+          <a:effectRef idx="2">
+            <a:schemeClr val="accent1"/>
+          </a:effectRef>
+          <a:fontRef idx="minor">
+            <a:schemeClr val="lt1"/>
+          </a:fontRef>
+        </p:style>
+        <p:txBody>
+          <a:bodyPr rtlCol="0" anchor="ctr" wrap="square"/>
+          <a:lstStyle/>
+          <a:p>
+            <a:pPr algn="ctr"/>
+          </a:p>
+        </p:txBody>
+      </p:sp>
+      <p:sp>
+        <p:nvSpPr>
+          <p:cNvPr id="34" name="Oval 33"/>
+          <p:cNvSpPr/>
+          <p:nvPr/>
+        </p:nvSpPr>
+        <p:spPr>
+          <a:xfrm>
+            <a:off x="4709160" y="4178808"/>
+            <a:ext cx="219456" cy="219456"/>
+          </a:xfrm>
+          <a:prstGeom prst="ellipse">
+            <a:avLst/>
+          </a:prstGeom>
+          <a:noFill/>
+          <a:ln w="12700">
+            <a:solidFill>
+              <a:srgbClr val="5F1EBE"/>
+            </a:solidFill>
+          </a:ln>
+          <a:effectLst/>
+        </p:spPr>
+        <p:style>
+          <a:lnRef idx="1">
+            <a:schemeClr val="accent1"/>
+          </a:lnRef>
+          <a:fillRef idx="3">
+            <a:schemeClr val="accent1"/>
+          </a:fillRef>
+          <a:effectRef idx="2">
+            <a:schemeClr val="accent1"/>
+          </a:effectRef>
+          <a:fontRef idx="minor">
+            <a:schemeClr val="lt1"/>
+          </a:fontRef>
+        </p:style>
+        <p:txBody>
+          <a:bodyPr rtlCol="0" anchor="ctr" wrap="square"/>
+          <a:lstStyle/>
+          <a:p>
+            <a:pPr algn="ctr"/>
+          </a:p>
+        </p:txBody>
+      </p:sp>
+      <p:sp>
+        <p:nvSpPr>
+          <p:cNvPr id="35" name="Oval 34"/>
+          <p:cNvSpPr/>
+          <p:nvPr/>
+        </p:nvSpPr>
+        <p:spPr>
+          <a:xfrm>
+            <a:off x="4764024" y="4233672"/>
+            <a:ext cx="109728" cy="109728"/>
+          </a:xfrm>
+          <a:prstGeom prst="ellipse">
+            <a:avLst/>
+          </a:prstGeom>
+          <a:noFill/>
+          <a:ln w="12700">
+            <a:solidFill>
+              <a:srgbClr val="5F1EBE"/>
+            </a:solidFill>
+          </a:ln>
+          <a:effectLst/>
+        </p:spPr>
+        <p:style>
+          <a:lnRef idx="1">
+            <a:schemeClr val="accent1"/>
+          </a:lnRef>
+          <a:fillRef idx="3">
+            <a:schemeClr val="accent1"/>
+          </a:fillRef>
+          <a:effectRef idx="2">
+            <a:schemeClr val="accent1"/>
+          </a:effectRef>
+          <a:fontRef idx="minor">
+            <a:schemeClr val="lt1"/>
+          </a:fontRef>
+        </p:style>
+        <p:txBody>
+          <a:bodyPr rtlCol="0" anchor="ctr" wrap="square"/>
+          <a:lstStyle/>
+          <a:p>
+            <a:pPr algn="ctr"/>
+          </a:p>
+        </p:txBody>
+      </p:sp>
+      <p:sp>
+        <p:nvSpPr>
+          <p:cNvPr id="36" name="Oval 35"/>
+          <p:cNvSpPr/>
+          <p:nvPr/>
+        </p:nvSpPr>
+        <p:spPr>
+          <a:xfrm>
+            <a:off x="4801331" y="4270979"/>
+            <a:ext cx="35112" cy="35112"/>
+          </a:xfrm>
+          <a:prstGeom prst="ellipse">
+            <a:avLst/>
+          </a:prstGeom>
+          <a:solidFill>
+            <a:srgbClr val="5F1EBE"/>
+          </a:solidFill>
+          <a:ln>
+            <a:noFill/>
+          </a:ln>
+          <a:effectLst/>
+        </p:spPr>
+        <p:style>
+          <a:lnRef idx="1">
+            <a:schemeClr val="accent1"/>
+          </a:lnRef>
+          <a:fillRef idx="3">
+            <a:schemeClr val="accent1"/>
+          </a:fillRef>
+          <a:effectRef idx="2">
+            <a:schemeClr val="accent1"/>
+          </a:effectRef>
+          <a:fontRef idx="minor">
+            <a:schemeClr val="lt1"/>
+          </a:fontRef>
+        </p:style>
+        <p:txBody>
+          <a:bodyPr rtlCol="0" anchor="ctr" wrap="square"/>
+          <a:lstStyle/>
+          <a:p>
+            <a:pPr algn="ctr"/>
+          </a:p>
+        </p:txBody>
+      </p:sp>
+      <p:sp>
+        <p:nvSpPr>
+          <p:cNvPr id="37" name="TextBox 36"/>
+          <p:cNvSpPr txBox="1"/>
+          <p:nvPr/>
+        </p:nvSpPr>
+        <p:spPr>
+          <a:xfrm>
+            <a:off x="5175504" y="4023360"/>
+            <a:ext cx="2404872" cy="530352"/>
+          </a:xfrm>
+          <a:prstGeom prst="rect">
+            <a:avLst/>
+          </a:prstGeom>
+          <a:noFill/>
+        </p:spPr>
+        <p:txBody>
+          <a:bodyPr wrap="square" lIns="0" rIns="0" tIns="0" bIns="0" anchor="ctr">
+            <a:spAutoFit/>
+          </a:bodyPr>
+          <a:lstStyle/>
+          <a:p>
+            <a:pPr algn="l">
+              <a:lnSpc>
+                <a:spcPct val="110000"/>
+              </a:lnSpc>
+              <a:spcAft>
+                <a:spcPts val="0"/>
+              </a:spcAft>
+            </a:pPr>
+            <a:r>
+              <a:rPr sz="1000" b="1">
+                <a:solidFill>
+                  <a:srgbClr val="5F1EBE"/>
+                </a:solidFill>
+                <a:latin typeface="Aptos"/>
+              </a:rPr>
+              <a:t>5   </a:t>
+            </a:r>
+            <a:r>
+              <a:rPr sz="1150" b="1">
+                <a:solidFill>
+                  <a:srgbClr val="000000"/>
+                </a:solidFill>
+                <a:latin typeface="Aptos"/>
+              </a:rPr>
+              <a:t>Decision rights</a:t>
+            </a:r>
+          </a:p>
+        </p:txBody>
+      </p:sp>
+      <p:sp>
+        <p:nvSpPr>
+          <p:cNvPr id="38" name="Freeform 37"/>
+          <p:cNvSpPr/>
+          <p:nvPr/>
+        </p:nvSpPr>
+        <p:spPr>
+          <a:xfrm>
+            <a:off x="4608576" y="4754880"/>
+            <a:ext cx="2971799" cy="0"/>
+          </a:xfrm>
+          <a:custGeom>
+            <a:avLst/>
+            <a:gdLst/>
+            <a:ahLst/>
+            <a:cxnLst/>
+            <a:rect l="l" t="t" r="r" b="b"/>
+            <a:pathLst>
+              <a:path w="2971799" h="0">
+                <a:moveTo>
+                  <a:pt x="0" y="0"/>
+                </a:moveTo>
+                <a:lnTo>
+                  <a:pt x="2971799" y="0"/>
+                </a:lnTo>
+              </a:path>
+            </a:pathLst>
+          </a:custGeom>
+          <a:noFill/>
+          <a:ln w="9525">
+            <a:solidFill>
+              <a:srgbClr val="E6EBF5"/>
+            </a:solidFill>
+          </a:ln>
+          <a:effectLst/>
+        </p:spPr>
+        <p:style>
+          <a:lnRef idx="1">
+            <a:schemeClr val="accent1"/>
+          </a:lnRef>
+          <a:fillRef idx="3">
+            <a:schemeClr val="accent1"/>
+          </a:fillRef>
+          <a:effectRef idx="2">
+            <a:schemeClr val="accent1"/>
+          </a:effectRef>
+          <a:fontRef idx="minor">
+            <a:schemeClr val="lt1"/>
+          </a:fontRef>
+        </p:style>
+        <p:txBody>
+          <a:bodyPr rtlCol="0" anchor="ctr"/>
+          <a:lstStyle/>
+          <a:p>
+            <a:pPr algn="ctr"/>
+          </a:p>
+        </p:txBody>
+      </p:sp>
+      <p:sp>
+        <p:nvSpPr>
+          <p:cNvPr id="39" name="TextBox 38"/>
+          <p:cNvSpPr txBox="1"/>
+          <p:nvPr/>
+        </p:nvSpPr>
+        <p:spPr>
+          <a:xfrm>
+            <a:off x="4608576" y="4882896"/>
+            <a:ext cx="2971800" cy="402336"/>
+          </a:xfrm>
+          <a:prstGeom prst="rect">
+            <a:avLst/>
+          </a:prstGeom>
+          <a:noFill/>
+        </p:spPr>
+        <p:txBody>
+          <a:bodyPr wrap="square" lIns="0" rIns="0" tIns="0" bIns="0" anchor="ctr">
+            <a:spAutoFit/>
+          </a:bodyPr>
+          <a:lstStyle/>
+          <a:p>
+            <a:pPr algn="l">
+              <a:lnSpc>
+                <a:spcPct val="110000"/>
+              </a:lnSpc>
+              <a:spcAft>
+                <a:spcPts val="0"/>
+              </a:spcAft>
+            </a:pPr>
+            <a:r>
+              <a:rPr sz="1050" b="0">
+                <a:solidFill>
+                  <a:srgbClr val="5F1EBE"/>
+                </a:solidFill>
+                <a:latin typeface="Aptos"/>
+              </a:rPr>
+              <a:t>Decisions move at speed</a:t>
+            </a:r>
+          </a:p>
+        </p:txBody>
+      </p:sp>
+      <p:sp>
+        <p:nvSpPr>
+          <p:cNvPr id="40" name="Rounded Rectangle 39"/>
+          <p:cNvSpPr/>
+          <p:nvPr/>
+        </p:nvSpPr>
+        <p:spPr>
+          <a:xfrm>
+            <a:off x="8074152" y="1883664"/>
+            <a:ext cx="3520440" cy="3602736"/>
           </a:xfrm>
           <a:prstGeom prst="roundRect">
             <a:avLst>
-              <a:gd name="adj" fmla="val 16000"/>
+              <a:gd name="adj" fmla="val 4500"/>
             </a:avLst>
           </a:prstGeom>
           <a:solidFill>
@@ -2895,66 +4099,23 @@
       </p:sp>
       <p:sp>
         <p:nvSpPr>
-          <p:cNvPr id="17" name="Rounded Rectangle 16"/>
+          <p:cNvPr id="41" name="Round Same Side Corner Rectangle 40"/>
           <p:cNvSpPr/>
           <p:nvPr/>
         </p:nvSpPr>
         <p:spPr>
           <a:xfrm>
-            <a:off x="1143000" y="4700016"/>
-            <a:ext cx="64008" cy="438912"/>
-          </a:xfrm>
-          <a:prstGeom prst="roundRect">
+            <a:off x="8074152" y="1883664"/>
+            <a:ext cx="3520440" cy="658368"/>
+          </a:xfrm>
+          <a:prstGeom prst="round2SameRect">
             <a:avLst>
-              <a:gd name="adj" fmla="val 50000"/>
+              <a:gd name="adj1" fmla="val 16000"/>
+              <a:gd name="adj2" fmla="val 0"/>
             </a:avLst>
           </a:prstGeom>
           <a:solidFill>
-            <a:srgbClr val="391E8E"/>
-          </a:solidFill>
-          <a:ln>
-            <a:noFill/>
-          </a:ln>
-          <a:effectLst/>
-        </p:spPr>
-        <p:style>
-          <a:lnRef idx="1">
-            <a:schemeClr val="accent1"/>
-          </a:lnRef>
-          <a:fillRef idx="3">
-            <a:schemeClr val="accent1"/>
-          </a:fillRef>
-          <a:effectRef idx="2">
-            <a:schemeClr val="accent1"/>
-          </a:effectRef>
-          <a:fontRef idx="minor">
-            <a:schemeClr val="lt1"/>
-          </a:fontRef>
-        </p:style>
-        <p:txBody>
-          <a:bodyPr rtlCol="0" anchor="ctr" wrap="square"/>
-          <a:lstStyle/>
-          <a:p>
-            <a:pPr algn="ctr"/>
-          </a:p>
-        </p:txBody>
-      </p:sp>
-      <p:sp>
-        <p:nvSpPr>
-          <p:cNvPr id="18" name="Oval 17"/>
-          <p:cNvSpPr/>
-          <p:nvPr/>
-        </p:nvSpPr>
-        <p:spPr>
-          <a:xfrm>
-            <a:off x="1307592" y="4764024"/>
-            <a:ext cx="310896" cy="310896"/>
-          </a:xfrm>
-          <a:prstGeom prst="ellipse">
-            <a:avLst/>
-          </a:prstGeom>
-          <a:solidFill>
-            <a:srgbClr val="391E8E"/>
+            <a:srgbClr val="0F5FDC"/>
           </a:solidFill>
           <a:ln>
             <a:noFill/>
@@ -2988,400 +4149,15 @@
               </a:spcAft>
             </a:pPr>
             <a:r>
-              <a:rPr sz="1200" b="1">
+              <a:rPr sz="900" b="1">
                 <a:solidFill>
-                  <a:srgbClr val="FFFFFF"/>
+                  <a:srgbClr val="B9C8FF"/>
                 </a:solidFill>
                 <a:latin typeface="Aptos"/>
               </a:rPr>
-              <a:t>2</a:t>
+              <a:t>PHASE 3</a:t>
             </a:r>
           </a:p>
-        </p:txBody>
-      </p:sp>
-      <p:sp>
-        <p:nvSpPr>
-          <p:cNvPr id="19" name="TextBox 18"/>
-          <p:cNvSpPr txBox="1"/>
-          <p:nvPr/>
-        </p:nvSpPr>
-        <p:spPr>
-          <a:xfrm>
-            <a:off x="1728216" y="4700016"/>
-            <a:ext cx="2560320" cy="438912"/>
-          </a:xfrm>
-          <a:prstGeom prst="rect">
-            <a:avLst/>
-          </a:prstGeom>
-          <a:noFill/>
-        </p:spPr>
-        <p:txBody>
-          <a:bodyPr wrap="square" lIns="0" rIns="0" tIns="0" bIns="0" anchor="ctr">
-            <a:spAutoFit/>
-          </a:bodyPr>
-          <a:lstStyle/>
-          <a:p>
-            <a:pPr algn="l">
-              <a:spcAft>
-                <a:spcPts val="0"/>
-              </a:spcAft>
-            </a:pPr>
-            <a:r>
-              <a:rPr sz="1050" b="1">
-                <a:solidFill>
-                  <a:srgbClr val="391E8E"/>
-                </a:solidFill>
-                <a:latin typeface="Aptos"/>
-              </a:rPr>
-              <a:t>Transition and quality</a:t>
-            </a:r>
-          </a:p>
-        </p:txBody>
-      </p:sp>
-      <p:sp>
-        <p:nvSpPr>
-          <p:cNvPr id="20" name="Freeform 19"/>
-          <p:cNvSpPr/>
-          <p:nvPr/>
-        </p:nvSpPr>
-        <p:spPr>
-          <a:xfrm>
-            <a:off x="4343400" y="4791456"/>
-            <a:ext cx="0" cy="256032"/>
-          </a:xfrm>
-          <a:custGeom>
-            <a:avLst/>
-            <a:gdLst/>
-            <a:ahLst/>
-            <a:cxnLst/>
-            <a:rect l="l" t="t" r="r" b="b"/>
-            <a:pathLst>
-              <a:path w="0" h="256032">
-                <a:moveTo>
-                  <a:pt x="0" y="0"/>
-                </a:moveTo>
-                <a:lnTo>
-                  <a:pt x="0" y="256032"/>
-                </a:lnTo>
-              </a:path>
-            </a:pathLst>
-          </a:custGeom>
-          <a:noFill/>
-          <a:ln w="9525">
-            <a:solidFill>
-              <a:srgbClr val="C8D2DD"/>
-            </a:solidFill>
-          </a:ln>
-          <a:effectLst/>
-        </p:spPr>
-        <p:style>
-          <a:lnRef idx="1">
-            <a:schemeClr val="accent1"/>
-          </a:lnRef>
-          <a:fillRef idx="3">
-            <a:schemeClr val="accent1"/>
-          </a:fillRef>
-          <a:effectRef idx="2">
-            <a:schemeClr val="accent1"/>
-          </a:effectRef>
-          <a:fontRef idx="minor">
-            <a:schemeClr val="lt1"/>
-          </a:fontRef>
-        </p:style>
-        <p:txBody>
-          <a:bodyPr rtlCol="0" anchor="ctr"/>
-          <a:lstStyle/>
-          <a:p>
-            <a:pPr algn="ctr"/>
-          </a:p>
-        </p:txBody>
-      </p:sp>
-      <p:sp>
-        <p:nvSpPr>
-          <p:cNvPr id="21" name="Oval 20"/>
-          <p:cNvSpPr/>
-          <p:nvPr/>
-        </p:nvSpPr>
-        <p:spPr>
-          <a:xfrm>
-            <a:off x="4489704" y="4782312"/>
-            <a:ext cx="274320" cy="274320"/>
-          </a:xfrm>
-          <a:prstGeom prst="ellipse">
-            <a:avLst/>
-          </a:prstGeom>
-          <a:solidFill>
-            <a:srgbClr val="FFFFFF"/>
-          </a:solidFill>
-          <a:ln w="9525">
-            <a:solidFill>
-              <a:srgbClr val="C8D2DD"/>
-            </a:solidFill>
-          </a:ln>
-          <a:effectLst/>
-        </p:spPr>
-        <p:style>
-          <a:lnRef idx="1">
-            <a:schemeClr val="accent1"/>
-          </a:lnRef>
-          <a:fillRef idx="3">
-            <a:schemeClr val="accent1"/>
-          </a:fillRef>
-          <a:effectRef idx="2">
-            <a:schemeClr val="accent1"/>
-          </a:effectRef>
-          <a:fontRef idx="minor">
-            <a:schemeClr val="lt1"/>
-          </a:fontRef>
-        </p:style>
-        <p:txBody>
-          <a:bodyPr rtlCol="0" anchor="ctr" wrap="square"/>
-          <a:lstStyle/>
-          <a:p>
-            <a:pPr algn="ctr"/>
-          </a:p>
-        </p:txBody>
-      </p:sp>
-      <p:sp>
-        <p:nvSpPr>
-          <p:cNvPr id="22" name="Freeform 21"/>
-          <p:cNvSpPr/>
-          <p:nvPr/>
-        </p:nvSpPr>
-        <p:spPr>
-          <a:xfrm>
-            <a:off x="4564684" y="4844856"/>
-            <a:ext cx="124359" cy="155448"/>
-          </a:xfrm>
-          <a:custGeom>
-            <a:avLst/>
-            <a:gdLst/>
-            <a:ahLst/>
-            <a:cxnLst/>
-            <a:rect l="l" t="t" r="r" b="b"/>
-            <a:pathLst>
-              <a:path w="124359" h="155448">
-                <a:moveTo>
-                  <a:pt x="0" y="0"/>
-                </a:moveTo>
-                <a:lnTo>
-                  <a:pt x="124359" y="0"/>
-                </a:lnTo>
-                <a:lnTo>
-                  <a:pt x="124359" y="83942"/>
-                </a:lnTo>
-                <a:lnTo>
-                  <a:pt x="62180" y="155448"/>
-                </a:lnTo>
-                <a:lnTo>
-                  <a:pt x="0" y="83942"/>
-                </a:lnTo>
-                <a:close/>
-              </a:path>
-            </a:pathLst>
-          </a:custGeom>
-          <a:noFill/>
-          <a:ln w="12700">
-            <a:solidFill>
-              <a:srgbClr val="391E8E"/>
-            </a:solidFill>
-          </a:ln>
-          <a:effectLst/>
-        </p:spPr>
-        <p:style>
-          <a:lnRef idx="1">
-            <a:schemeClr val="accent1"/>
-          </a:lnRef>
-          <a:fillRef idx="3">
-            <a:schemeClr val="accent1"/>
-          </a:fillRef>
-          <a:effectRef idx="2">
-            <a:schemeClr val="accent1"/>
-          </a:effectRef>
-          <a:fontRef idx="minor">
-            <a:schemeClr val="lt1"/>
-          </a:fontRef>
-        </p:style>
-        <p:txBody>
-          <a:bodyPr rtlCol="0" anchor="ctr"/>
-          <a:lstStyle/>
-          <a:p>
-            <a:pPr algn="ctr"/>
-          </a:p>
-        </p:txBody>
-      </p:sp>
-      <p:sp>
-        <p:nvSpPr>
-          <p:cNvPr id="23" name="TextBox 22"/>
-          <p:cNvSpPr txBox="1"/>
-          <p:nvPr/>
-        </p:nvSpPr>
-        <p:spPr>
-          <a:xfrm>
-            <a:off x="4892040" y="4700016"/>
-            <a:ext cx="4663440" cy="438912"/>
-          </a:xfrm>
-          <a:prstGeom prst="rect">
-            <a:avLst/>
-          </a:prstGeom>
-          <a:noFill/>
-        </p:spPr>
-        <p:txBody>
-          <a:bodyPr wrap="square" lIns="0" rIns="0" tIns="0" bIns="0" anchor="ctr">
-            <a:spAutoFit/>
-          </a:bodyPr>
-          <a:lstStyle/>
-          <a:p>
-            <a:pPr algn="l">
-              <a:spcAft>
-                <a:spcPts val="0"/>
-              </a:spcAft>
-            </a:pPr>
-            <a:r>
-              <a:rPr sz="950" b="0">
-                <a:solidFill>
-                  <a:srgbClr val="000000"/>
-                </a:solidFill>
-                <a:latin typeface="Aptos"/>
-              </a:rPr>
-              <a:t>Execute transitions flawlessly and build a culture of quality</a:t>
-            </a:r>
-          </a:p>
-        </p:txBody>
-      </p:sp>
-      <p:sp>
-        <p:nvSpPr>
-          <p:cNvPr id="24" name="Rounded Rectangle 23"/>
-          <p:cNvSpPr/>
-          <p:nvPr/>
-        </p:nvSpPr>
-        <p:spPr>
-          <a:xfrm>
-            <a:off x="1417319" y="4224528"/>
-            <a:ext cx="8595360" cy="438912"/>
-          </a:xfrm>
-          <a:prstGeom prst="roundRect">
-            <a:avLst>
-              <a:gd name="adj" fmla="val 16000"/>
-            </a:avLst>
-          </a:prstGeom>
-          <a:solidFill>
-            <a:srgbClr val="E6EBF5"/>
-          </a:solidFill>
-          <a:ln w="9525">
-            <a:solidFill>
-              <a:srgbClr val="C8D2DD"/>
-            </a:solidFill>
-          </a:ln>
-          <a:effectLst/>
-        </p:spPr>
-        <p:style>
-          <a:lnRef idx="1">
-            <a:schemeClr val="accent1"/>
-          </a:lnRef>
-          <a:fillRef idx="3">
-            <a:schemeClr val="accent1"/>
-          </a:fillRef>
-          <a:effectRef idx="2">
-            <a:schemeClr val="accent1"/>
-          </a:effectRef>
-          <a:fontRef idx="minor">
-            <a:schemeClr val="lt1"/>
-          </a:fontRef>
-        </p:style>
-        <p:txBody>
-          <a:bodyPr rtlCol="0" anchor="ctr" wrap="square"/>
-          <a:lstStyle/>
-          <a:p>
-            <a:pPr algn="ctr"/>
-          </a:p>
-        </p:txBody>
-      </p:sp>
-      <p:sp>
-        <p:nvSpPr>
-          <p:cNvPr id="25" name="Rounded Rectangle 24"/>
-          <p:cNvSpPr/>
-          <p:nvPr/>
-        </p:nvSpPr>
-        <p:spPr>
-          <a:xfrm>
-            <a:off x="1417319" y="4224528"/>
-            <a:ext cx="64008" cy="438912"/>
-          </a:xfrm>
-          <a:prstGeom prst="roundRect">
-            <a:avLst>
-              <a:gd name="adj" fmla="val 50000"/>
-            </a:avLst>
-          </a:prstGeom>
-          <a:solidFill>
-            <a:srgbClr val="32299B"/>
-          </a:solidFill>
-          <a:ln>
-            <a:noFill/>
-          </a:ln>
-          <a:effectLst/>
-        </p:spPr>
-        <p:style>
-          <a:lnRef idx="1">
-            <a:schemeClr val="accent1"/>
-          </a:lnRef>
-          <a:fillRef idx="3">
-            <a:schemeClr val="accent1"/>
-          </a:fillRef>
-          <a:effectRef idx="2">
-            <a:schemeClr val="accent1"/>
-          </a:effectRef>
-          <a:fontRef idx="minor">
-            <a:schemeClr val="lt1"/>
-          </a:fontRef>
-        </p:style>
-        <p:txBody>
-          <a:bodyPr rtlCol="0" anchor="ctr" wrap="square"/>
-          <a:lstStyle/>
-          <a:p>
-            <a:pPr algn="ctr"/>
-          </a:p>
-        </p:txBody>
-      </p:sp>
-      <p:sp>
-        <p:nvSpPr>
-          <p:cNvPr id="26" name="Oval 25"/>
-          <p:cNvSpPr/>
-          <p:nvPr/>
-        </p:nvSpPr>
-        <p:spPr>
-          <a:xfrm>
-            <a:off x="1581911" y="4288536"/>
-            <a:ext cx="310896" cy="310896"/>
-          </a:xfrm>
-          <a:prstGeom prst="ellipse">
-            <a:avLst/>
-          </a:prstGeom>
-          <a:solidFill>
-            <a:srgbClr val="32299B"/>
-          </a:solidFill>
-          <a:ln>
-            <a:noFill/>
-          </a:ln>
-          <a:effectLst/>
-        </p:spPr>
-        <p:style>
-          <a:lnRef idx="1">
-            <a:schemeClr val="accent1"/>
-          </a:lnRef>
-          <a:fillRef idx="3">
-            <a:schemeClr val="accent1"/>
-          </a:fillRef>
-          <a:effectRef idx="2">
-            <a:schemeClr val="accent1"/>
-          </a:effectRef>
-          <a:fontRef idx="minor">
-            <a:schemeClr val="lt1"/>
-          </a:fontRef>
-        </p:style>
-        <p:txBody>
-          <a:bodyPr rtlCol="0" anchor="ctr" wrap="square" lIns="54864" rIns="54864" tIns="0" bIns="0"/>
-          <a:lstStyle/>
           <a:p>
             <a:pPr algn="ctr">
               <a:lnSpc>
@@ -3392,27 +4168,159 @@
               </a:spcAft>
             </a:pPr>
             <a:r>
-              <a:rPr sz="1200" b="1">
+              <a:rPr sz="1500" b="1">
                 <a:solidFill>
                   <a:srgbClr val="FFFFFF"/>
                 </a:solidFill>
                 <a:latin typeface="Aptos"/>
               </a:rPr>
-              <a:t>3</a:t>
+              <a:t>Align to the customer</a:t>
             </a:r>
           </a:p>
         </p:txBody>
       </p:sp>
       <p:sp>
         <p:nvSpPr>
-          <p:cNvPr id="27" name="TextBox 26"/>
+          <p:cNvPr id="42" name="Oval 41"/>
+          <p:cNvSpPr/>
+          <p:nvPr/>
+        </p:nvSpPr>
+        <p:spPr>
+          <a:xfrm>
+            <a:off x="8348472" y="2761488"/>
+            <a:ext cx="420624" cy="420624"/>
+          </a:xfrm>
+          <a:prstGeom prst="ellipse">
+            <a:avLst/>
+          </a:prstGeom>
+          <a:solidFill>
+            <a:srgbClr val="E6EBF5"/>
+          </a:solidFill>
+          <a:ln>
+            <a:noFill/>
+          </a:ln>
+          <a:effectLst/>
+        </p:spPr>
+        <p:style>
+          <a:lnRef idx="1">
+            <a:schemeClr val="accent1"/>
+          </a:lnRef>
+          <a:fillRef idx="3">
+            <a:schemeClr val="accent1"/>
+          </a:fillRef>
+          <a:effectRef idx="2">
+            <a:schemeClr val="accent1"/>
+          </a:effectRef>
+          <a:fontRef idx="minor">
+            <a:schemeClr val="lt1"/>
+          </a:fontRef>
+        </p:style>
+        <p:txBody>
+          <a:bodyPr rtlCol="0" anchor="ctr" wrap="square"/>
+          <a:lstStyle/>
+          <a:p>
+            <a:pPr algn="ctr"/>
+          </a:p>
+        </p:txBody>
+      </p:sp>
+      <p:sp>
+        <p:nvSpPr>
+          <p:cNvPr id="43" name="Oval 42"/>
+          <p:cNvSpPr/>
+          <p:nvPr/>
+        </p:nvSpPr>
+        <p:spPr>
+          <a:xfrm>
+            <a:off x="8453445" y="2905963"/>
+            <a:ext cx="131673" cy="131673"/>
+          </a:xfrm>
+          <a:prstGeom prst="ellipse">
+            <a:avLst/>
+          </a:prstGeom>
+          <a:noFill/>
+          <a:ln w="12700">
+            <a:solidFill>
+              <a:srgbClr val="0F5FDC"/>
+            </a:solidFill>
+          </a:ln>
+          <a:effectLst/>
+        </p:spPr>
+        <p:style>
+          <a:lnRef idx="1">
+            <a:schemeClr val="accent1"/>
+          </a:lnRef>
+          <a:fillRef idx="3">
+            <a:schemeClr val="accent1"/>
+          </a:fillRef>
+          <a:effectRef idx="2">
+            <a:schemeClr val="accent1"/>
+          </a:effectRef>
+          <a:fontRef idx="minor">
+            <a:schemeClr val="lt1"/>
+          </a:fontRef>
+        </p:style>
+        <p:txBody>
+          <a:bodyPr rtlCol="0" anchor="ctr" wrap="square"/>
+          <a:lstStyle/>
+          <a:p>
+            <a:pPr algn="ctr"/>
+          </a:p>
+        </p:txBody>
+      </p:sp>
+      <p:sp>
+        <p:nvSpPr>
+          <p:cNvPr id="44" name="Oval 43"/>
+          <p:cNvSpPr/>
+          <p:nvPr/>
+        </p:nvSpPr>
+        <p:spPr>
+          <a:xfrm>
+            <a:off x="8532449" y="2905963"/>
+            <a:ext cx="131673" cy="131673"/>
+          </a:xfrm>
+          <a:prstGeom prst="ellipse">
+            <a:avLst/>
+          </a:prstGeom>
+          <a:noFill/>
+          <a:ln w="12700">
+            <a:solidFill>
+              <a:srgbClr val="0F5FDC"/>
+            </a:solidFill>
+          </a:ln>
+          <a:effectLst/>
+        </p:spPr>
+        <p:style>
+          <a:lnRef idx="1">
+            <a:schemeClr val="accent1"/>
+          </a:lnRef>
+          <a:fillRef idx="3">
+            <a:schemeClr val="accent1"/>
+          </a:fillRef>
+          <a:effectRef idx="2">
+            <a:schemeClr val="accent1"/>
+          </a:effectRef>
+          <a:fontRef idx="minor">
+            <a:schemeClr val="lt1"/>
+          </a:fontRef>
+        </p:style>
+        <p:txBody>
+          <a:bodyPr rtlCol="0" anchor="ctr" wrap="square"/>
+          <a:lstStyle/>
+          <a:p>
+            <a:pPr algn="ctr"/>
+          </a:p>
+        </p:txBody>
+      </p:sp>
+      <p:sp>
+        <p:nvSpPr>
+          <p:cNvPr id="45" name="TextBox 44"/>
           <p:cNvSpPr txBox="1"/>
           <p:nvPr/>
         </p:nvSpPr>
         <p:spPr>
           <a:xfrm>
-            <a:off x="2002536" y="4224528"/>
-            <a:ext cx="2560320" cy="438912"/>
+            <a:off x="8915400" y="2706624"/>
+            <a:ext cx="2404872" cy="530352"/>
           </a:xfrm>
           <a:prstGeom prst="rect">
             <a:avLst/>
@@ -3426,32 +4334,220 @@
           <a:lstStyle/>
           <a:p>
             <a:pPr algn="l">
+              <a:lnSpc>
+                <a:spcPct val="110000"/>
+              </a:lnSpc>
               <a:spcAft>
                 <a:spcPts val="0"/>
               </a:spcAft>
             </a:pPr>
             <a:r>
-              <a:rPr sz="1050" b="1">
+              <a:rPr sz="1000" b="1">
                 <a:solidFill>
-                  <a:srgbClr val="32299B"/>
+                  <a:srgbClr val="0F5FDC"/>
                 </a:solidFill>
                 <a:latin typeface="Aptos"/>
               </a:rPr>
-              <a:t>Delayering — reduced hierarchy</a:t>
+              <a:t>6   </a:t>
             </a:r>
-          </a:p>
-        </p:txBody>
-      </p:sp>
-      <p:sp>
-        <p:nvSpPr>
-          <p:cNvPr id="28" name="Freeform 27"/>
+            <a:r>
+              <a:rPr sz="1150" b="1">
+                <a:solidFill>
+                  <a:srgbClr val="000000"/>
+                </a:solidFill>
+                <a:latin typeface="Aptos"/>
+              </a:rPr>
+              <a:t>ISD in key accounts</a:t>
+            </a:r>
+          </a:p>
+        </p:txBody>
+      </p:sp>
+      <p:sp>
+        <p:nvSpPr>
+          <p:cNvPr id="46" name="Oval 45"/>
           <p:cNvSpPr/>
           <p:nvPr/>
         </p:nvSpPr>
         <p:spPr>
           <a:xfrm>
-            <a:off x="4617720" y="4315968"/>
-            <a:ext cx="0" cy="256032"/>
+            <a:off x="8348472" y="3419856"/>
+            <a:ext cx="420624" cy="420624"/>
+          </a:xfrm>
+          <a:prstGeom prst="ellipse">
+            <a:avLst/>
+          </a:prstGeom>
+          <a:solidFill>
+            <a:srgbClr val="E6EBF5"/>
+          </a:solidFill>
+          <a:ln>
+            <a:noFill/>
+          </a:ln>
+          <a:effectLst/>
+        </p:spPr>
+        <p:style>
+          <a:lnRef idx="1">
+            <a:schemeClr val="accent1"/>
+          </a:lnRef>
+          <a:fillRef idx="3">
+            <a:schemeClr val="accent1"/>
+          </a:fillRef>
+          <a:effectRef idx="2">
+            <a:schemeClr val="accent1"/>
+          </a:effectRef>
+          <a:fontRef idx="minor">
+            <a:schemeClr val="lt1"/>
+          </a:fontRef>
+        </p:style>
+        <p:txBody>
+          <a:bodyPr rtlCol="0" anchor="ctr" wrap="square"/>
+          <a:lstStyle/>
+          <a:p>
+            <a:pPr algn="ctr"/>
+          </a:p>
+        </p:txBody>
+      </p:sp>
+      <p:sp>
+        <p:nvSpPr>
+          <p:cNvPr id="47" name="Oval 46"/>
+          <p:cNvSpPr/>
+          <p:nvPr/>
+        </p:nvSpPr>
+        <p:spPr>
+          <a:xfrm>
+            <a:off x="8534643" y="3529218"/>
+            <a:ext cx="48280" cy="48280"/>
+          </a:xfrm>
+          <a:prstGeom prst="ellipse">
+            <a:avLst/>
+          </a:prstGeom>
+          <a:solidFill>
+            <a:srgbClr val="0F5FDC"/>
+          </a:solidFill>
+          <a:ln>
+            <a:noFill/>
+          </a:ln>
+          <a:effectLst/>
+        </p:spPr>
+        <p:style>
+          <a:lnRef idx="1">
+            <a:schemeClr val="accent1"/>
+          </a:lnRef>
+          <a:fillRef idx="3">
+            <a:schemeClr val="accent1"/>
+          </a:fillRef>
+          <a:effectRef idx="2">
+            <a:schemeClr val="accent1"/>
+          </a:effectRef>
+          <a:fontRef idx="minor">
+            <a:schemeClr val="lt1"/>
+          </a:fontRef>
+        </p:style>
+        <p:txBody>
+          <a:bodyPr rtlCol="0" anchor="ctr" wrap="square"/>
+          <a:lstStyle/>
+          <a:p>
+            <a:pPr algn="ctr"/>
+          </a:p>
+        </p:txBody>
+      </p:sp>
+      <p:sp>
+        <p:nvSpPr>
+          <p:cNvPr id="48" name="Oval 47"/>
+          <p:cNvSpPr/>
+          <p:nvPr/>
+        </p:nvSpPr>
+        <p:spPr>
+          <a:xfrm>
+            <a:off x="8471001" y="3674059"/>
+            <a:ext cx="48280" cy="48280"/>
+          </a:xfrm>
+          <a:prstGeom prst="ellipse">
+            <a:avLst/>
+          </a:prstGeom>
+          <a:solidFill>
+            <a:srgbClr val="0F5FDC"/>
+          </a:solidFill>
+          <a:ln>
+            <a:noFill/>
+          </a:ln>
+          <a:effectLst/>
+        </p:spPr>
+        <p:style>
+          <a:lnRef idx="1">
+            <a:schemeClr val="accent1"/>
+          </a:lnRef>
+          <a:fillRef idx="3">
+            <a:schemeClr val="accent1"/>
+          </a:fillRef>
+          <a:effectRef idx="2">
+            <a:schemeClr val="accent1"/>
+          </a:effectRef>
+          <a:fontRef idx="minor">
+            <a:schemeClr val="lt1"/>
+          </a:fontRef>
+        </p:style>
+        <p:txBody>
+          <a:bodyPr rtlCol="0" anchor="ctr" wrap="square"/>
+          <a:lstStyle/>
+          <a:p>
+            <a:pPr algn="ctr"/>
+          </a:p>
+        </p:txBody>
+      </p:sp>
+      <p:sp>
+        <p:nvSpPr>
+          <p:cNvPr id="49" name="Oval 48"/>
+          <p:cNvSpPr/>
+          <p:nvPr/>
+        </p:nvSpPr>
+        <p:spPr>
+          <a:xfrm>
+            <a:off x="8598286" y="3674059"/>
+            <a:ext cx="48280" cy="48280"/>
+          </a:xfrm>
+          <a:prstGeom prst="ellipse">
+            <a:avLst/>
+          </a:prstGeom>
+          <a:solidFill>
+            <a:srgbClr val="0F5FDC"/>
+          </a:solidFill>
+          <a:ln>
+            <a:noFill/>
+          </a:ln>
+          <a:effectLst/>
+        </p:spPr>
+        <p:style>
+          <a:lnRef idx="1">
+            <a:schemeClr val="accent1"/>
+          </a:lnRef>
+          <a:fillRef idx="3">
+            <a:schemeClr val="accent1"/>
+          </a:fillRef>
+          <a:effectRef idx="2">
+            <a:schemeClr val="accent1"/>
+          </a:effectRef>
+          <a:fontRef idx="minor">
+            <a:schemeClr val="lt1"/>
+          </a:fontRef>
+        </p:style>
+        <p:txBody>
+          <a:bodyPr rtlCol="0" anchor="ctr" wrap="square"/>
+          <a:lstStyle/>
+          <a:p>
+            <a:pPr algn="ctr"/>
+          </a:p>
+        </p:txBody>
+      </p:sp>
+      <p:sp>
+        <p:nvSpPr>
+          <p:cNvPr id="50" name="Freeform 49"/>
+          <p:cNvSpPr/>
+          <p:nvPr/>
+        </p:nvSpPr>
+        <p:spPr>
+          <a:xfrm>
+            <a:off x="8495141" y="3586276"/>
+            <a:ext cx="63643" cy="92172"/>
           </a:xfrm>
           <a:custGeom>
             <a:avLst/>
@@ -3460,12 +4556,376 @@
             <a:cxnLst/>
             <a:rect l="l" t="t" r="r" b="b"/>
             <a:pathLst>
-              <a:path w="0" h="256032">
+              <a:path w="63643" h="92172">
+                <a:moveTo>
+                  <a:pt x="63643" y="0"/>
+                </a:moveTo>
+                <a:lnTo>
+                  <a:pt x="0" y="92172"/>
+                </a:lnTo>
+              </a:path>
+            </a:pathLst>
+          </a:custGeom>
+          <a:noFill/>
+          <a:ln w="10160">
+            <a:solidFill>
+              <a:srgbClr val="0F5FDC"/>
+            </a:solidFill>
+          </a:ln>
+          <a:effectLst/>
+        </p:spPr>
+        <p:style>
+          <a:lnRef idx="1">
+            <a:schemeClr val="accent1"/>
+          </a:lnRef>
+          <a:fillRef idx="3">
+            <a:schemeClr val="accent1"/>
+          </a:fillRef>
+          <a:effectRef idx="2">
+            <a:schemeClr val="accent1"/>
+          </a:effectRef>
+          <a:fontRef idx="minor">
+            <a:schemeClr val="lt1"/>
+          </a:fontRef>
+        </p:style>
+        <p:txBody>
+          <a:bodyPr rtlCol="0" anchor="ctr"/>
+          <a:lstStyle/>
+          <a:p>
+            <a:pPr algn="ctr"/>
+          </a:p>
+        </p:txBody>
+      </p:sp>
+      <p:sp>
+        <p:nvSpPr>
+          <p:cNvPr id="51" name="Freeform 50"/>
+          <p:cNvSpPr/>
+          <p:nvPr/>
+        </p:nvSpPr>
+        <p:spPr>
+          <a:xfrm>
+            <a:off x="8558784" y="3586276"/>
+            <a:ext cx="63642" cy="92172"/>
+          </a:xfrm>
+          <a:custGeom>
+            <a:avLst/>
+            <a:gdLst/>
+            <a:ahLst/>
+            <a:cxnLst/>
+            <a:rect l="l" t="t" r="r" b="b"/>
+            <a:pathLst>
+              <a:path w="63642" h="92172">
                 <a:moveTo>
                   <a:pt x="0" y="0"/>
                 </a:moveTo>
                 <a:lnTo>
-                  <a:pt x="0" y="256032"/>
+                  <a:pt x="63642" y="92172"/>
+                </a:lnTo>
+              </a:path>
+            </a:pathLst>
+          </a:custGeom>
+          <a:noFill/>
+          <a:ln w="10160">
+            <a:solidFill>
+              <a:srgbClr val="0F5FDC"/>
+            </a:solidFill>
+          </a:ln>
+          <a:effectLst/>
+        </p:spPr>
+        <p:style>
+          <a:lnRef idx="1">
+            <a:schemeClr val="accent1"/>
+          </a:lnRef>
+          <a:fillRef idx="3">
+            <a:schemeClr val="accent1"/>
+          </a:fillRef>
+          <a:effectRef idx="2">
+            <a:schemeClr val="accent1"/>
+          </a:effectRef>
+          <a:fontRef idx="minor">
+            <a:schemeClr val="lt1"/>
+          </a:fontRef>
+        </p:style>
+        <p:txBody>
+          <a:bodyPr rtlCol="0" anchor="ctr"/>
+          <a:lstStyle/>
+          <a:p>
+            <a:pPr algn="ctr"/>
+          </a:p>
+        </p:txBody>
+      </p:sp>
+      <p:sp>
+        <p:nvSpPr>
+          <p:cNvPr id="52" name="Freeform 51"/>
+          <p:cNvSpPr/>
+          <p:nvPr/>
+        </p:nvSpPr>
+        <p:spPr>
+          <a:xfrm>
+            <a:off x="8495141" y="3696004"/>
+            <a:ext cx="127285" cy="0"/>
+          </a:xfrm>
+          <a:custGeom>
+            <a:avLst/>
+            <a:gdLst/>
+            <a:ahLst/>
+            <a:cxnLst/>
+            <a:rect l="l" t="t" r="r" b="b"/>
+            <a:pathLst>
+              <a:path w="127285" h="0">
+                <a:moveTo>
+                  <a:pt x="0" y="0"/>
+                </a:moveTo>
+                <a:lnTo>
+                  <a:pt x="127285" y="0"/>
+                </a:lnTo>
+              </a:path>
+            </a:pathLst>
+          </a:custGeom>
+          <a:noFill/>
+          <a:ln w="10160">
+            <a:solidFill>
+              <a:srgbClr val="0F5FDC"/>
+            </a:solidFill>
+          </a:ln>
+          <a:effectLst/>
+        </p:spPr>
+        <p:style>
+          <a:lnRef idx="1">
+            <a:schemeClr val="accent1"/>
+          </a:lnRef>
+          <a:fillRef idx="3">
+            <a:schemeClr val="accent1"/>
+          </a:fillRef>
+          <a:effectRef idx="2">
+            <a:schemeClr val="accent1"/>
+          </a:effectRef>
+          <a:fontRef idx="minor">
+            <a:schemeClr val="lt1"/>
+          </a:fontRef>
+        </p:style>
+        <p:txBody>
+          <a:bodyPr rtlCol="0" anchor="ctr"/>
+          <a:lstStyle/>
+          <a:p>
+            <a:pPr algn="ctr"/>
+          </a:p>
+        </p:txBody>
+      </p:sp>
+      <p:sp>
+        <p:nvSpPr>
+          <p:cNvPr id="53" name="TextBox 52"/>
+          <p:cNvSpPr txBox="1"/>
+          <p:nvPr/>
+        </p:nvSpPr>
+        <p:spPr>
+          <a:xfrm>
+            <a:off x="8915400" y="3364991"/>
+            <a:ext cx="2404872" cy="530352"/>
+          </a:xfrm>
+          <a:prstGeom prst="rect">
+            <a:avLst/>
+          </a:prstGeom>
+          <a:noFill/>
+        </p:spPr>
+        <p:txBody>
+          <a:bodyPr wrap="square" lIns="0" rIns="0" tIns="0" bIns="0" anchor="ctr">
+            <a:spAutoFit/>
+          </a:bodyPr>
+          <a:lstStyle/>
+          <a:p>
+            <a:pPr algn="l">
+              <a:lnSpc>
+                <a:spcPct val="110000"/>
+              </a:lnSpc>
+              <a:spcAft>
+                <a:spcPts val="0"/>
+              </a:spcAft>
+            </a:pPr>
+            <a:r>
+              <a:rPr sz="1000" b="1">
+                <a:solidFill>
+                  <a:srgbClr val="0F5FDC"/>
+                </a:solidFill>
+                <a:latin typeface="Aptos"/>
+              </a:rPr>
+              <a:t>7   </a:t>
+            </a:r>
+            <a:r>
+              <a:rPr sz="1150" b="1">
+                <a:solidFill>
+                  <a:srgbClr val="000000"/>
+                </a:solidFill>
+                <a:latin typeface="Aptos"/>
+              </a:rPr>
+              <a:t>Transformation reporting</a:t>
+            </a:r>
+          </a:p>
+        </p:txBody>
+      </p:sp>
+      <p:sp>
+        <p:nvSpPr>
+          <p:cNvPr id="54" name="Oval 53"/>
+          <p:cNvSpPr/>
+          <p:nvPr/>
+        </p:nvSpPr>
+        <p:spPr>
+          <a:xfrm>
+            <a:off x="8348472" y="4078224"/>
+            <a:ext cx="420624" cy="420624"/>
+          </a:xfrm>
+          <a:prstGeom prst="ellipse">
+            <a:avLst/>
+          </a:prstGeom>
+          <a:solidFill>
+            <a:srgbClr val="E6EBF5"/>
+          </a:solidFill>
+          <a:ln>
+            <a:noFill/>
+          </a:ln>
+          <a:effectLst/>
+        </p:spPr>
+        <p:style>
+          <a:lnRef idx="1">
+            <a:schemeClr val="accent1"/>
+          </a:lnRef>
+          <a:fillRef idx="3">
+            <a:schemeClr val="accent1"/>
+          </a:fillRef>
+          <a:effectRef idx="2">
+            <a:schemeClr val="accent1"/>
+          </a:effectRef>
+          <a:fontRef idx="minor">
+            <a:schemeClr val="lt1"/>
+          </a:fontRef>
+        </p:style>
+        <p:txBody>
+          <a:bodyPr rtlCol="0" anchor="ctr" wrap="square"/>
+          <a:lstStyle/>
+          <a:p>
+            <a:pPr algn="ctr"/>
+          </a:p>
+        </p:txBody>
+      </p:sp>
+      <p:sp>
+        <p:nvSpPr>
+          <p:cNvPr id="55" name="5-Point Star 54"/>
+          <p:cNvSpPr/>
+          <p:nvPr/>
+        </p:nvSpPr>
+        <p:spPr>
+          <a:xfrm>
+            <a:off x="8453445" y="4183197"/>
+            <a:ext cx="210677" cy="210677"/>
+          </a:xfrm>
+          <a:prstGeom prst="star5">
+            <a:avLst/>
+          </a:prstGeom>
+          <a:noFill/>
+          <a:ln w="12700">
+            <a:solidFill>
+              <a:srgbClr val="0F5FDC"/>
+            </a:solidFill>
+          </a:ln>
+          <a:effectLst/>
+        </p:spPr>
+        <p:style>
+          <a:lnRef idx="1">
+            <a:schemeClr val="accent1"/>
+          </a:lnRef>
+          <a:fillRef idx="3">
+            <a:schemeClr val="accent1"/>
+          </a:fillRef>
+          <a:effectRef idx="2">
+            <a:schemeClr val="accent1"/>
+          </a:effectRef>
+          <a:fontRef idx="minor">
+            <a:schemeClr val="lt1"/>
+          </a:fontRef>
+        </p:style>
+        <p:txBody>
+          <a:bodyPr rtlCol="0" anchor="ctr" wrap="square"/>
+          <a:lstStyle/>
+          <a:p>
+            <a:pPr algn="ctr"/>
+          </a:p>
+        </p:txBody>
+      </p:sp>
+      <p:sp>
+        <p:nvSpPr>
+          <p:cNvPr id="56" name="TextBox 55"/>
+          <p:cNvSpPr txBox="1"/>
+          <p:nvPr/>
+        </p:nvSpPr>
+        <p:spPr>
+          <a:xfrm>
+            <a:off x="8915400" y="4023360"/>
+            <a:ext cx="2404872" cy="530352"/>
+          </a:xfrm>
+          <a:prstGeom prst="rect">
+            <a:avLst/>
+          </a:prstGeom>
+          <a:noFill/>
+        </p:spPr>
+        <p:txBody>
+          <a:bodyPr wrap="square" lIns="0" rIns="0" tIns="0" bIns="0" anchor="ctr">
+            <a:spAutoFit/>
+          </a:bodyPr>
+          <a:lstStyle/>
+          <a:p>
+            <a:pPr algn="l">
+              <a:lnSpc>
+                <a:spcPct val="110000"/>
+              </a:lnSpc>
+              <a:spcAft>
+                <a:spcPts val="0"/>
+              </a:spcAft>
+            </a:pPr>
+            <a:r>
+              <a:rPr sz="1000" b="1">
+                <a:solidFill>
+                  <a:srgbClr val="0F5FDC"/>
+                </a:solidFill>
+                <a:latin typeface="Aptos"/>
+              </a:rPr>
+              <a:t>8   </a:t>
+            </a:r>
+            <a:r>
+              <a:rPr sz="1150" b="1">
+                <a:solidFill>
+                  <a:srgbClr val="000000"/>
+                </a:solidFill>
+                <a:latin typeface="Aptos"/>
+              </a:rPr>
+              <a:t>VDU customer alignment</a:t>
+            </a:r>
+          </a:p>
+        </p:txBody>
+      </p:sp>
+      <p:sp>
+        <p:nvSpPr>
+          <p:cNvPr id="57" name="Freeform 56"/>
+          <p:cNvSpPr/>
+          <p:nvPr/>
+        </p:nvSpPr>
+        <p:spPr>
+          <a:xfrm>
+            <a:off x="8348472" y="4754880"/>
+            <a:ext cx="2971800" cy="0"/>
+          </a:xfrm>
+          <a:custGeom>
+            <a:avLst/>
+            <a:gdLst/>
+            <a:ahLst/>
+            <a:cxnLst/>
+            <a:rect l="l" t="t" r="r" b="b"/>
+            <a:pathLst>
+              <a:path w="2971800" h="0">
+                <a:moveTo>
+                  <a:pt x="0" y="0"/>
+                </a:moveTo>
+                <a:lnTo>
+                  <a:pt x="2971800" y="0"/>
                 </a:lnTo>
               </a:path>
             </a:pathLst>
@@ -3473,7 +4933,7 @@
           <a:noFill/>
           <a:ln w="9525">
             <a:solidFill>
-              <a:srgbClr val="C8D2DD"/>
+              <a:srgbClr val="E6EBF5"/>
             </a:solidFill>
           </a:ln>
           <a:effectLst/>
@@ -3502,192 +4962,14 @@
       </p:sp>
       <p:sp>
         <p:nvSpPr>
-          <p:cNvPr id="29" name="Oval 28"/>
-          <p:cNvSpPr/>
-          <p:nvPr/>
-        </p:nvSpPr>
-        <p:spPr>
-          <a:xfrm>
-            <a:off x="4764024" y="4306824"/>
-            <a:ext cx="274320" cy="274320"/>
-          </a:xfrm>
-          <a:prstGeom prst="ellipse">
-            <a:avLst/>
-          </a:prstGeom>
-          <a:solidFill>
-            <a:srgbClr val="FFFFFF"/>
-          </a:solidFill>
-          <a:ln w="9525">
-            <a:solidFill>
-              <a:srgbClr val="C8D2DD"/>
-            </a:solidFill>
-          </a:ln>
-          <a:effectLst/>
-        </p:spPr>
-        <p:style>
-          <a:lnRef idx="1">
-            <a:schemeClr val="accent1"/>
-          </a:lnRef>
-          <a:fillRef idx="3">
-            <a:schemeClr val="accent1"/>
-          </a:fillRef>
-          <a:effectRef idx="2">
-            <a:schemeClr val="accent1"/>
-          </a:effectRef>
-          <a:fontRef idx="minor">
-            <a:schemeClr val="lt1"/>
-          </a:fontRef>
-        </p:style>
-        <p:txBody>
-          <a:bodyPr rtlCol="0" anchor="ctr" wrap="square"/>
-          <a:lstStyle/>
-          <a:p>
-            <a:pPr algn="ctr"/>
-          </a:p>
-        </p:txBody>
-      </p:sp>
-      <p:sp>
-        <p:nvSpPr>
-          <p:cNvPr id="30" name="Diamond 29"/>
-          <p:cNvSpPr/>
-          <p:nvPr/>
-        </p:nvSpPr>
-        <p:spPr>
-          <a:xfrm>
-            <a:off x="4832786" y="4377141"/>
-            <a:ext cx="136794" cy="40416"/>
-          </a:xfrm>
-          <a:prstGeom prst="diamond">
-            <a:avLst/>
-          </a:prstGeom>
-          <a:solidFill>
-            <a:srgbClr val="32299B"/>
-          </a:solidFill>
-          <a:ln>
-            <a:noFill/>
-          </a:ln>
-          <a:effectLst/>
-        </p:spPr>
-        <p:style>
-          <a:lnRef idx="1">
-            <a:schemeClr val="accent1"/>
-          </a:lnRef>
-          <a:fillRef idx="3">
-            <a:schemeClr val="accent1"/>
-          </a:fillRef>
-          <a:effectRef idx="2">
-            <a:schemeClr val="accent1"/>
-          </a:effectRef>
-          <a:fontRef idx="minor">
-            <a:schemeClr val="lt1"/>
-          </a:fontRef>
-        </p:style>
-        <p:txBody>
-          <a:bodyPr rtlCol="0" anchor="ctr" wrap="square"/>
-          <a:lstStyle/>
-          <a:p>
-            <a:pPr algn="ctr"/>
-          </a:p>
-        </p:txBody>
-      </p:sp>
-      <p:sp>
-        <p:nvSpPr>
-          <p:cNvPr id="31" name="Diamond 30"/>
-          <p:cNvSpPr/>
-          <p:nvPr/>
-        </p:nvSpPr>
-        <p:spPr>
-          <a:xfrm>
-            <a:off x="4832786" y="4420666"/>
-            <a:ext cx="136794" cy="40416"/>
-          </a:xfrm>
-          <a:prstGeom prst="diamond">
-            <a:avLst/>
-          </a:prstGeom>
-          <a:noFill/>
-          <a:ln w="12700">
-            <a:solidFill>
-              <a:srgbClr val="32299B"/>
-            </a:solidFill>
-          </a:ln>
-          <a:effectLst/>
-        </p:spPr>
-        <p:style>
-          <a:lnRef idx="1">
-            <a:schemeClr val="accent1"/>
-          </a:lnRef>
-          <a:fillRef idx="3">
-            <a:schemeClr val="accent1"/>
-          </a:fillRef>
-          <a:effectRef idx="2">
-            <a:schemeClr val="accent1"/>
-          </a:effectRef>
-          <a:fontRef idx="minor">
-            <a:schemeClr val="lt1"/>
-          </a:fontRef>
-        </p:style>
-        <p:txBody>
-          <a:bodyPr rtlCol="0" anchor="ctr" wrap="square"/>
-          <a:lstStyle/>
-          <a:p>
-            <a:pPr algn="ctr"/>
-          </a:p>
-        </p:txBody>
-      </p:sp>
-      <p:sp>
-        <p:nvSpPr>
-          <p:cNvPr id="32" name="Diamond 31"/>
-          <p:cNvSpPr/>
-          <p:nvPr/>
-        </p:nvSpPr>
-        <p:spPr>
-          <a:xfrm>
-            <a:off x="4832786" y="4464192"/>
-            <a:ext cx="136794" cy="40416"/>
-          </a:xfrm>
-          <a:prstGeom prst="diamond">
-            <a:avLst/>
-          </a:prstGeom>
-          <a:noFill/>
-          <a:ln w="12700">
-            <a:solidFill>
-              <a:srgbClr val="32299B"/>
-            </a:solidFill>
-          </a:ln>
-          <a:effectLst/>
-        </p:spPr>
-        <p:style>
-          <a:lnRef idx="1">
-            <a:schemeClr val="accent1"/>
-          </a:lnRef>
-          <a:fillRef idx="3">
-            <a:schemeClr val="accent1"/>
-          </a:fillRef>
-          <a:effectRef idx="2">
-            <a:schemeClr val="accent1"/>
-          </a:effectRef>
-          <a:fontRef idx="minor">
-            <a:schemeClr val="lt1"/>
-          </a:fontRef>
-        </p:style>
-        <p:txBody>
-          <a:bodyPr rtlCol="0" anchor="ctr" wrap="square"/>
-          <a:lstStyle/>
-          <a:p>
-            <a:pPr algn="ctr"/>
-          </a:p>
-        </p:txBody>
-      </p:sp>
-      <p:sp>
-        <p:nvSpPr>
-          <p:cNvPr id="33" name="TextBox 32"/>
+          <p:cNvPr id="58" name="TextBox 57"/>
           <p:cNvSpPr txBox="1"/>
           <p:nvPr/>
         </p:nvSpPr>
         <p:spPr>
           <a:xfrm>
-            <a:off x="5166359" y="4224528"/>
-            <a:ext cx="4663440" cy="438912"/>
+            <a:off x="8348472" y="4882896"/>
+            <a:ext cx="2971800" cy="402336"/>
           </a:xfrm>
           <a:prstGeom prst="rect">
             <a:avLst/>
@@ -3701,248 +4983,44 @@
           <a:lstStyle/>
           <a:p>
             <a:pPr algn="l">
-              <a:spcAft>
-                <a:spcPts val="0"/>
-              </a:spcAft>
-            </a:pPr>
-            <a:r>
-              <a:rPr sz="950" b="0">
-                <a:solidFill>
-                  <a:srgbClr val="000000"/>
-                </a:solidFill>
-                <a:latin typeface="Aptos"/>
-              </a:rPr>
-              <a:t>Simplify structure to increase speed, agility and empowerment</a:t>
-            </a:r>
-          </a:p>
-        </p:txBody>
-      </p:sp>
-      <p:sp>
-        <p:nvSpPr>
-          <p:cNvPr id="34" name="Rounded Rectangle 33"/>
-          <p:cNvSpPr/>
-          <p:nvPr/>
-        </p:nvSpPr>
-        <p:spPr>
-          <a:xfrm>
-            <a:off x="1691639" y="3749039"/>
-            <a:ext cx="8595360" cy="438912"/>
-          </a:xfrm>
-          <a:prstGeom prst="roundRect">
-            <a:avLst>
-              <a:gd name="adj" fmla="val 16000"/>
-            </a:avLst>
-          </a:prstGeom>
-          <a:solidFill>
-            <a:srgbClr val="FFFFFF"/>
-          </a:solidFill>
-          <a:ln w="9525">
-            <a:solidFill>
-              <a:srgbClr val="C8D2DD"/>
-            </a:solidFill>
-          </a:ln>
-          <a:effectLst/>
-        </p:spPr>
-        <p:style>
-          <a:lnRef idx="1">
-            <a:schemeClr val="accent1"/>
-          </a:lnRef>
-          <a:fillRef idx="3">
-            <a:schemeClr val="accent1"/>
-          </a:fillRef>
-          <a:effectRef idx="2">
-            <a:schemeClr val="accent1"/>
-          </a:effectRef>
-          <a:fontRef idx="minor">
-            <a:schemeClr val="lt1"/>
-          </a:fontRef>
-        </p:style>
-        <p:txBody>
-          <a:bodyPr rtlCol="0" anchor="ctr" wrap="square"/>
-          <a:lstStyle/>
-          <a:p>
-            <a:pPr algn="ctr"/>
-          </a:p>
-        </p:txBody>
-      </p:sp>
-      <p:sp>
-        <p:nvSpPr>
-          <p:cNvPr id="35" name="Rounded Rectangle 34"/>
-          <p:cNvSpPr/>
-          <p:nvPr/>
-        </p:nvSpPr>
-        <p:spPr>
-          <a:xfrm>
-            <a:off x="1691639" y="3749039"/>
-            <a:ext cx="64008" cy="438912"/>
-          </a:xfrm>
-          <a:prstGeom prst="roundRect">
-            <a:avLst>
-              <a:gd name="adj" fmla="val 50000"/>
-            </a:avLst>
-          </a:prstGeom>
-          <a:solidFill>
-            <a:srgbClr val="2B34A8"/>
-          </a:solidFill>
-          <a:ln>
-            <a:noFill/>
-          </a:ln>
-          <a:effectLst/>
-        </p:spPr>
-        <p:style>
-          <a:lnRef idx="1">
-            <a:schemeClr val="accent1"/>
-          </a:lnRef>
-          <a:fillRef idx="3">
-            <a:schemeClr val="accent1"/>
-          </a:fillRef>
-          <a:effectRef idx="2">
-            <a:schemeClr val="accent1"/>
-          </a:effectRef>
-          <a:fontRef idx="minor">
-            <a:schemeClr val="lt1"/>
-          </a:fontRef>
-        </p:style>
-        <p:txBody>
-          <a:bodyPr rtlCol="0" anchor="ctr" wrap="square"/>
-          <a:lstStyle/>
-          <a:p>
-            <a:pPr algn="ctr"/>
-          </a:p>
-        </p:txBody>
-      </p:sp>
-      <p:sp>
-        <p:nvSpPr>
-          <p:cNvPr id="36" name="Oval 35"/>
-          <p:cNvSpPr/>
-          <p:nvPr/>
-        </p:nvSpPr>
-        <p:spPr>
-          <a:xfrm>
-            <a:off x="1856231" y="3813048"/>
-            <a:ext cx="310896" cy="310896"/>
-          </a:xfrm>
-          <a:prstGeom prst="ellipse">
-            <a:avLst/>
-          </a:prstGeom>
-          <a:solidFill>
-            <a:srgbClr val="2B34A8"/>
-          </a:solidFill>
-          <a:ln>
-            <a:noFill/>
-          </a:ln>
-          <a:effectLst/>
-        </p:spPr>
-        <p:style>
-          <a:lnRef idx="1">
-            <a:schemeClr val="accent1"/>
-          </a:lnRef>
-          <a:fillRef idx="3">
-            <a:schemeClr val="accent1"/>
-          </a:fillRef>
-          <a:effectRef idx="2">
-            <a:schemeClr val="accent1"/>
-          </a:effectRef>
-          <a:fontRef idx="minor">
-            <a:schemeClr val="lt1"/>
-          </a:fontRef>
-        </p:style>
-        <p:txBody>
-          <a:bodyPr rtlCol="0" anchor="ctr" wrap="square" lIns="54864" rIns="54864" tIns="0" bIns="0"/>
-          <a:lstStyle/>
-          <a:p>
-            <a:pPr algn="ctr">
               <a:lnSpc>
-                <a:spcPct val="98000"/>
+                <a:spcPct val="110000"/>
               </a:lnSpc>
               <a:spcAft>
                 <a:spcPts val="0"/>
               </a:spcAft>
             </a:pPr>
             <a:r>
-              <a:rPr sz="1200" b="1">
+              <a:rPr sz="1050" b="0">
                 <a:solidFill>
-                  <a:srgbClr val="FFFFFF"/>
+                  <a:srgbClr val="0F5FDC"/>
                 </a:solidFill>
                 <a:latin typeface="Aptos"/>
               </a:rPr>
-              <a:t>4</a:t>
+              <a:t>Customer outcomes lead delivery</a:t>
             </a:r>
           </a:p>
         </p:txBody>
       </p:sp>
       <p:sp>
         <p:nvSpPr>
-          <p:cNvPr id="37" name="TextBox 36"/>
-          <p:cNvSpPr txBox="1"/>
-          <p:nvPr/>
-        </p:nvSpPr>
-        <p:spPr>
-          <a:xfrm>
-            <a:off x="2276856" y="3749039"/>
-            <a:ext cx="2560320" cy="438912"/>
-          </a:xfrm>
-          <a:prstGeom prst="rect">
+          <p:cNvPr id="59" name="Isosceles Triangle 58"/>
+          <p:cNvSpPr/>
+          <p:nvPr/>
+        </p:nvSpPr>
+        <p:spPr>
+          <a:xfrm rot="5400000">
+            <a:off x="4142232" y="3547872"/>
+            <a:ext cx="164592" cy="219456"/>
+          </a:xfrm>
+          <a:prstGeom prst="triangle">
             <a:avLst/>
           </a:prstGeom>
-          <a:noFill/>
-        </p:spPr>
-        <p:txBody>
-          <a:bodyPr wrap="square" lIns="0" rIns="0" tIns="0" bIns="0" anchor="ctr">
-            <a:spAutoFit/>
-          </a:bodyPr>
-          <a:lstStyle/>
-          <a:p>
-            <a:pPr algn="l">
-              <a:spcAft>
-                <a:spcPts val="0"/>
-              </a:spcAft>
-            </a:pPr>
-            <a:r>
-              <a:rPr sz="1050" b="1">
-                <a:solidFill>
-                  <a:srgbClr val="2B34A8"/>
-                </a:solidFill>
-                <a:latin typeface="Aptos"/>
-              </a:rPr>
-              <a:t>Span of control calibration</a:t>
-            </a:r>
-          </a:p>
-        </p:txBody>
-      </p:sp>
-      <p:sp>
-        <p:nvSpPr>
-          <p:cNvPr id="38" name="Freeform 37"/>
-          <p:cNvSpPr/>
-          <p:nvPr/>
-        </p:nvSpPr>
-        <p:spPr>
-          <a:xfrm>
-            <a:off x="4892040" y="3840479"/>
-            <a:ext cx="0" cy="256032"/>
-          </a:xfrm>
-          <a:custGeom>
-            <a:avLst/>
-            <a:gdLst/>
-            <a:ahLst/>
-            <a:cxnLst/>
-            <a:rect l="l" t="t" r="r" b="b"/>
-            <a:pathLst>
-              <a:path w="0" h="256032">
-                <a:moveTo>
-                  <a:pt x="0" y="0"/>
-                </a:moveTo>
-                <a:lnTo>
-                  <a:pt x="0" y="256032"/>
-                </a:lnTo>
-              </a:path>
-            </a:pathLst>
-          </a:custGeom>
-          <a:noFill/>
-          <a:ln w="9525">
-            <a:solidFill>
-              <a:srgbClr val="C8D2DD"/>
-            </a:solidFill>
+          <a:solidFill>
+            <a:srgbClr val="C8D2DD"/>
+          </a:solidFill>
+          <a:ln>
+            <a:noFill/>
           </a:ln>
           <a:effectLst/>
         </p:spPr>
@@ -3961,7 +5039,7 @@
           </a:fontRef>
         </p:style>
         <p:txBody>
-          <a:bodyPr rtlCol="0" anchor="ctr"/>
+          <a:bodyPr rtlCol="0" anchor="ctr" wrap="square"/>
           <a:lstStyle/>
           <a:p>
             <a:pPr algn="ctr"/>
@@ -3970,25 +5048,23 @@
       </p:sp>
       <p:sp>
         <p:nvSpPr>
-          <p:cNvPr id="39" name="Oval 38"/>
+          <p:cNvPr id="60" name="Isosceles Triangle 59"/>
           <p:cNvSpPr/>
           <p:nvPr/>
         </p:nvSpPr>
         <p:spPr>
-          <a:xfrm>
-            <a:off x="5038344" y="3831335"/>
-            <a:ext cx="274320" cy="274320"/>
-          </a:xfrm>
-          <a:prstGeom prst="ellipse">
+          <a:xfrm rot="5400000">
+            <a:off x="7882127" y="3547872"/>
+            <a:ext cx="164592" cy="219456"/>
+          </a:xfrm>
+          <a:prstGeom prst="triangle">
             <a:avLst/>
           </a:prstGeom>
           <a:solidFill>
-            <a:srgbClr val="FFFFFF"/>
+            <a:srgbClr val="C8D2DD"/>
           </a:solidFill>
-          <a:ln w="9525">
-            <a:solidFill>
-              <a:srgbClr val="C8D2DD"/>
-            </a:solidFill>
+          <a:ln>
+            <a:noFill/>
           </a:ln>
           <a:effectLst/>
         </p:spPr>
@@ -4016,2389 +5092,14 @@
       </p:sp>
       <p:sp>
         <p:nvSpPr>
-          <p:cNvPr id="40" name="Oval 39"/>
+          <p:cNvPr id="61" name="Rounded Rectangle 60"/>
           <p:cNvSpPr/>
           <p:nvPr/>
         </p:nvSpPr>
         <p:spPr>
           <a:xfrm>
-            <a:off x="5157627" y="3896989"/>
-            <a:ext cx="35753" cy="35753"/>
-          </a:xfrm>
-          <a:prstGeom prst="ellipse">
-            <a:avLst/>
-          </a:prstGeom>
-          <a:noFill/>
-          <a:ln w="12700">
-            <a:solidFill>
-              <a:srgbClr val="2B34A8"/>
-            </a:solidFill>
-          </a:ln>
-          <a:effectLst/>
-        </p:spPr>
-        <p:style>
-          <a:lnRef idx="1">
-            <a:schemeClr val="accent1"/>
-          </a:lnRef>
-          <a:fillRef idx="3">
-            <a:schemeClr val="accent1"/>
-          </a:fillRef>
-          <a:effectRef idx="2">
-            <a:schemeClr val="accent1"/>
-          </a:effectRef>
-          <a:fontRef idx="minor">
-            <a:schemeClr val="lt1"/>
-          </a:fontRef>
-        </p:style>
-        <p:txBody>
-          <a:bodyPr rtlCol="0" anchor="ctr" wrap="square"/>
-          <a:lstStyle/>
-          <a:p>
-            <a:pPr algn="ctr"/>
-          </a:p>
-        </p:txBody>
-      </p:sp>
-      <p:sp>
-        <p:nvSpPr>
-          <p:cNvPr id="41" name="Round Same Side Corner Rectangle 40"/>
-          <p:cNvSpPr/>
-          <p:nvPr/>
-        </p:nvSpPr>
-        <p:spPr>
-          <a:xfrm>
-            <a:off x="5142859" y="3943624"/>
-            <a:ext cx="65288" cy="52852"/>
-          </a:xfrm>
-          <a:prstGeom prst="round2SameRect">
-            <a:avLst>
-              <a:gd name="adj1" fmla="val 48000"/>
-              <a:gd name="adj2" fmla="val 0"/>
-            </a:avLst>
-          </a:prstGeom>
-          <a:noFill/>
-          <a:ln w="12700">
-            <a:solidFill>
-              <a:srgbClr val="2B34A8"/>
-            </a:solidFill>
-          </a:ln>
-          <a:effectLst/>
-        </p:spPr>
-        <p:style>
-          <a:lnRef idx="1">
-            <a:schemeClr val="accent1"/>
-          </a:lnRef>
-          <a:fillRef idx="3">
-            <a:schemeClr val="accent1"/>
-          </a:fillRef>
-          <a:effectRef idx="2">
-            <a:schemeClr val="accent1"/>
-          </a:effectRef>
-          <a:fontRef idx="minor">
-            <a:schemeClr val="lt1"/>
-          </a:fontRef>
-        </p:style>
-        <p:txBody>
-          <a:bodyPr rtlCol="0" anchor="ctr" wrap="square"/>
-          <a:lstStyle/>
-          <a:p>
-            <a:pPr algn="ctr"/>
-          </a:p>
-        </p:txBody>
-      </p:sp>
-      <p:sp>
-        <p:nvSpPr>
-          <p:cNvPr id="42" name="Oval 41"/>
-          <p:cNvSpPr/>
-          <p:nvPr/>
-        </p:nvSpPr>
-        <p:spPr>
-          <a:xfrm>
-            <a:off x="5107106" y="3909425"/>
-            <a:ext cx="29535" cy="29535"/>
-          </a:xfrm>
-          <a:prstGeom prst="ellipse">
-            <a:avLst/>
-          </a:prstGeom>
-          <a:noFill/>
-          <a:ln w="12700">
-            <a:solidFill>
-              <a:srgbClr val="2B34A8"/>
-            </a:solidFill>
-          </a:ln>
-          <a:effectLst/>
-        </p:spPr>
-        <p:style>
-          <a:lnRef idx="1">
-            <a:schemeClr val="accent1"/>
-          </a:lnRef>
-          <a:fillRef idx="3">
-            <a:schemeClr val="accent1"/>
-          </a:fillRef>
-          <a:effectRef idx="2">
-            <a:schemeClr val="accent1"/>
-          </a:effectRef>
-          <a:fontRef idx="minor">
-            <a:schemeClr val="lt1"/>
-          </a:fontRef>
-        </p:style>
-        <p:txBody>
-          <a:bodyPr rtlCol="0" anchor="ctr" wrap="square"/>
-          <a:lstStyle/>
-          <a:p>
-            <a:pPr algn="ctr"/>
-          </a:p>
-        </p:txBody>
-      </p:sp>
-      <p:sp>
-        <p:nvSpPr>
-          <p:cNvPr id="43" name="Round Same Side Corner Rectangle 42"/>
-          <p:cNvSpPr/>
-          <p:nvPr/>
-        </p:nvSpPr>
-        <p:spPr>
-          <a:xfrm>
-            <a:off x="5100888" y="3952951"/>
-            <a:ext cx="41970" cy="43525"/>
-          </a:xfrm>
-          <a:prstGeom prst="round2SameRect">
-            <a:avLst>
-              <a:gd name="adj1" fmla="val 48000"/>
-              <a:gd name="adj2" fmla="val 0"/>
-            </a:avLst>
-          </a:prstGeom>
-          <a:noFill/>
-          <a:ln w="12700">
-            <a:solidFill>
-              <a:srgbClr val="2B34A8"/>
-            </a:solidFill>
-          </a:ln>
-          <a:effectLst/>
-        </p:spPr>
-        <p:style>
-          <a:lnRef idx="1">
-            <a:schemeClr val="accent1"/>
-          </a:lnRef>
-          <a:fillRef idx="3">
-            <a:schemeClr val="accent1"/>
-          </a:fillRef>
-          <a:effectRef idx="2">
-            <a:schemeClr val="accent1"/>
-          </a:effectRef>
-          <a:fontRef idx="minor">
-            <a:schemeClr val="lt1"/>
-          </a:fontRef>
-        </p:style>
-        <p:txBody>
-          <a:bodyPr rtlCol="0" anchor="ctr" wrap="square"/>
-          <a:lstStyle/>
-          <a:p>
-            <a:pPr algn="ctr"/>
-          </a:p>
-        </p:txBody>
-      </p:sp>
-      <p:sp>
-        <p:nvSpPr>
-          <p:cNvPr id="44" name="Oval 43"/>
-          <p:cNvSpPr/>
-          <p:nvPr/>
-        </p:nvSpPr>
-        <p:spPr>
-          <a:xfrm>
-            <a:off x="5214366" y="3909425"/>
-            <a:ext cx="29535" cy="29535"/>
-          </a:xfrm>
-          <a:prstGeom prst="ellipse">
-            <a:avLst/>
-          </a:prstGeom>
-          <a:noFill/>
-          <a:ln w="12700">
-            <a:solidFill>
-              <a:srgbClr val="2B34A8"/>
-            </a:solidFill>
-          </a:ln>
-          <a:effectLst/>
-        </p:spPr>
-        <p:style>
-          <a:lnRef idx="1">
-            <a:schemeClr val="accent1"/>
-          </a:lnRef>
-          <a:fillRef idx="3">
-            <a:schemeClr val="accent1"/>
-          </a:fillRef>
-          <a:effectRef idx="2">
-            <a:schemeClr val="accent1"/>
-          </a:effectRef>
-          <a:fontRef idx="minor">
-            <a:schemeClr val="lt1"/>
-          </a:fontRef>
-        </p:style>
-        <p:txBody>
-          <a:bodyPr rtlCol="0" anchor="ctr" wrap="square"/>
-          <a:lstStyle/>
-          <a:p>
-            <a:pPr algn="ctr"/>
-          </a:p>
-        </p:txBody>
-      </p:sp>
-      <p:sp>
-        <p:nvSpPr>
-          <p:cNvPr id="45" name="Round Same Side Corner Rectangle 44"/>
-          <p:cNvSpPr/>
-          <p:nvPr/>
-        </p:nvSpPr>
-        <p:spPr>
-          <a:xfrm>
-            <a:off x="5208148" y="3952951"/>
-            <a:ext cx="41970" cy="43525"/>
-          </a:xfrm>
-          <a:prstGeom prst="round2SameRect">
-            <a:avLst>
-              <a:gd name="adj1" fmla="val 48000"/>
-              <a:gd name="adj2" fmla="val 0"/>
-            </a:avLst>
-          </a:prstGeom>
-          <a:noFill/>
-          <a:ln w="12700">
-            <a:solidFill>
-              <a:srgbClr val="2B34A8"/>
-            </a:solidFill>
-          </a:ln>
-          <a:effectLst/>
-        </p:spPr>
-        <p:style>
-          <a:lnRef idx="1">
-            <a:schemeClr val="accent1"/>
-          </a:lnRef>
-          <a:fillRef idx="3">
-            <a:schemeClr val="accent1"/>
-          </a:fillRef>
-          <a:effectRef idx="2">
-            <a:schemeClr val="accent1"/>
-          </a:effectRef>
-          <a:fontRef idx="minor">
-            <a:schemeClr val="lt1"/>
-          </a:fontRef>
-        </p:style>
-        <p:txBody>
-          <a:bodyPr rtlCol="0" anchor="ctr" wrap="square"/>
-          <a:lstStyle/>
-          <a:p>
-            <a:pPr algn="ctr"/>
-          </a:p>
-        </p:txBody>
-      </p:sp>
-      <p:sp>
-        <p:nvSpPr>
-          <p:cNvPr id="46" name="TextBox 45"/>
-          <p:cNvSpPr txBox="1"/>
-          <p:nvPr/>
-        </p:nvSpPr>
-        <p:spPr>
-          <a:xfrm>
-            <a:off x="5440679" y="3749039"/>
-            <a:ext cx="4663440" cy="438912"/>
-          </a:xfrm>
-          <a:prstGeom prst="rect">
-            <a:avLst/>
-          </a:prstGeom>
-          <a:noFill/>
-        </p:spPr>
-        <p:txBody>
-          <a:bodyPr wrap="square" lIns="0" rIns="0" tIns="0" bIns="0" anchor="ctr">
-            <a:spAutoFit/>
-          </a:bodyPr>
-          <a:lstStyle/>
-          <a:p>
-            <a:pPr algn="l">
-              <a:spcAft>
-                <a:spcPts val="0"/>
-              </a:spcAft>
-            </a:pPr>
-            <a:r>
-              <a:rPr sz="950" b="0">
-                <a:solidFill>
-                  <a:srgbClr val="000000"/>
-                </a:solidFill>
-                <a:latin typeface="Aptos"/>
-              </a:rPr>
-              <a:t>Deliberate spans per layer so no manager is silently overloaded</a:t>
-            </a:r>
-          </a:p>
-        </p:txBody>
-      </p:sp>
-      <p:sp>
-        <p:nvSpPr>
-          <p:cNvPr id="47" name="Rounded Rectangle 46"/>
-          <p:cNvSpPr/>
-          <p:nvPr/>
-        </p:nvSpPr>
-        <p:spPr>
-          <a:xfrm>
-            <a:off x="1965960" y="3273552"/>
-            <a:ext cx="8595360" cy="438912"/>
-          </a:xfrm>
-          <a:prstGeom prst="roundRect">
-            <a:avLst>
-              <a:gd name="adj" fmla="val 16000"/>
-            </a:avLst>
-          </a:prstGeom>
-          <a:solidFill>
-            <a:srgbClr val="E6EBF5"/>
-          </a:solidFill>
-          <a:ln w="9525">
-            <a:solidFill>
-              <a:srgbClr val="C8D2DD"/>
-            </a:solidFill>
-          </a:ln>
-          <a:effectLst/>
-        </p:spPr>
-        <p:style>
-          <a:lnRef idx="1">
-            <a:schemeClr val="accent1"/>
-          </a:lnRef>
-          <a:fillRef idx="3">
-            <a:schemeClr val="accent1"/>
-          </a:fillRef>
-          <a:effectRef idx="2">
-            <a:schemeClr val="accent1"/>
-          </a:effectRef>
-          <a:fontRef idx="minor">
-            <a:schemeClr val="lt1"/>
-          </a:fontRef>
-        </p:style>
-        <p:txBody>
-          <a:bodyPr rtlCol="0" anchor="ctr" wrap="square"/>
-          <a:lstStyle/>
-          <a:p>
-            <a:pPr algn="ctr"/>
-          </a:p>
-        </p:txBody>
-      </p:sp>
-      <p:sp>
-        <p:nvSpPr>
-          <p:cNvPr id="48" name="Rounded Rectangle 47"/>
-          <p:cNvSpPr/>
-          <p:nvPr/>
-        </p:nvSpPr>
-        <p:spPr>
-          <a:xfrm>
-            <a:off x="1965960" y="3273552"/>
-            <a:ext cx="64008" cy="438912"/>
-          </a:xfrm>
-          <a:prstGeom prst="roundRect">
-            <a:avLst>
-              <a:gd name="adj" fmla="val 50000"/>
-            </a:avLst>
-          </a:prstGeom>
-          <a:solidFill>
-            <a:srgbClr val="243EB5"/>
-          </a:solidFill>
-          <a:ln>
-            <a:noFill/>
-          </a:ln>
-          <a:effectLst/>
-        </p:spPr>
-        <p:style>
-          <a:lnRef idx="1">
-            <a:schemeClr val="accent1"/>
-          </a:lnRef>
-          <a:fillRef idx="3">
-            <a:schemeClr val="accent1"/>
-          </a:fillRef>
-          <a:effectRef idx="2">
-            <a:schemeClr val="accent1"/>
-          </a:effectRef>
-          <a:fontRef idx="minor">
-            <a:schemeClr val="lt1"/>
-          </a:fontRef>
-        </p:style>
-        <p:txBody>
-          <a:bodyPr rtlCol="0" anchor="ctr" wrap="square"/>
-          <a:lstStyle/>
-          <a:p>
-            <a:pPr algn="ctr"/>
-          </a:p>
-        </p:txBody>
-      </p:sp>
-      <p:sp>
-        <p:nvSpPr>
-          <p:cNvPr id="49" name="Oval 48"/>
-          <p:cNvSpPr/>
-          <p:nvPr/>
-        </p:nvSpPr>
-        <p:spPr>
-          <a:xfrm>
-            <a:off x="2130552" y="3337560"/>
-            <a:ext cx="310896" cy="310896"/>
-          </a:xfrm>
-          <a:prstGeom prst="ellipse">
-            <a:avLst/>
-          </a:prstGeom>
-          <a:solidFill>
-            <a:srgbClr val="243EB5"/>
-          </a:solidFill>
-          <a:ln>
-            <a:noFill/>
-          </a:ln>
-          <a:effectLst/>
-        </p:spPr>
-        <p:style>
-          <a:lnRef idx="1">
-            <a:schemeClr val="accent1"/>
-          </a:lnRef>
-          <a:fillRef idx="3">
-            <a:schemeClr val="accent1"/>
-          </a:fillRef>
-          <a:effectRef idx="2">
-            <a:schemeClr val="accent1"/>
-          </a:effectRef>
-          <a:fontRef idx="minor">
-            <a:schemeClr val="lt1"/>
-          </a:fontRef>
-        </p:style>
-        <p:txBody>
-          <a:bodyPr rtlCol="0" anchor="ctr" wrap="square" lIns="54864" rIns="54864" tIns="0" bIns="0"/>
-          <a:lstStyle/>
-          <a:p>
-            <a:pPr algn="ctr">
-              <a:lnSpc>
-                <a:spcPct val="98000"/>
-              </a:lnSpc>
-              <a:spcAft>
-                <a:spcPts val="0"/>
-              </a:spcAft>
-            </a:pPr>
-            <a:r>
-              <a:rPr sz="1200" b="1">
-                <a:solidFill>
-                  <a:srgbClr val="FFFFFF"/>
-                </a:solidFill>
-                <a:latin typeface="Aptos"/>
-              </a:rPr>
-              <a:t>5</a:t>
-            </a:r>
-          </a:p>
-        </p:txBody>
-      </p:sp>
-      <p:sp>
-        <p:nvSpPr>
-          <p:cNvPr id="50" name="TextBox 49"/>
-          <p:cNvSpPr txBox="1"/>
-          <p:nvPr/>
-        </p:nvSpPr>
-        <p:spPr>
-          <a:xfrm>
-            <a:off x="2551176" y="3273552"/>
-            <a:ext cx="2560320" cy="438912"/>
-          </a:xfrm>
-          <a:prstGeom prst="rect">
-            <a:avLst/>
-          </a:prstGeom>
-          <a:noFill/>
-        </p:spPr>
-        <p:txBody>
-          <a:bodyPr wrap="square" lIns="0" rIns="0" tIns="0" bIns="0" anchor="ctr">
-            <a:spAutoFit/>
-          </a:bodyPr>
-          <a:lstStyle/>
-          <a:p>
-            <a:pPr algn="l">
-              <a:spcAft>
-                <a:spcPts val="0"/>
-              </a:spcAft>
-            </a:pPr>
-            <a:r>
-              <a:rPr sz="1050" b="1">
-                <a:solidFill>
-                  <a:srgbClr val="243EB5"/>
-                </a:solidFill>
-                <a:latin typeface="Aptos"/>
-              </a:rPr>
-              <a:t>Decision rights and authority</a:t>
-            </a:r>
-          </a:p>
-        </p:txBody>
-      </p:sp>
-      <p:sp>
-        <p:nvSpPr>
-          <p:cNvPr id="51" name="Freeform 50"/>
-          <p:cNvSpPr/>
-          <p:nvPr/>
-        </p:nvSpPr>
-        <p:spPr>
-          <a:xfrm>
-            <a:off x="5166360" y="3364992"/>
-            <a:ext cx="0" cy="256032"/>
-          </a:xfrm>
-          <a:custGeom>
-            <a:avLst/>
-            <a:gdLst/>
-            <a:ahLst/>
-            <a:cxnLst/>
-            <a:rect l="l" t="t" r="r" b="b"/>
-            <a:pathLst>
-              <a:path w="0" h="256032">
-                <a:moveTo>
-                  <a:pt x="0" y="0"/>
-                </a:moveTo>
-                <a:lnTo>
-                  <a:pt x="0" y="256032"/>
-                </a:lnTo>
-              </a:path>
-            </a:pathLst>
-          </a:custGeom>
-          <a:noFill/>
-          <a:ln w="9525">
-            <a:solidFill>
-              <a:srgbClr val="C8D2DD"/>
-            </a:solidFill>
-          </a:ln>
-          <a:effectLst/>
-        </p:spPr>
-        <p:style>
-          <a:lnRef idx="1">
-            <a:schemeClr val="accent1"/>
-          </a:lnRef>
-          <a:fillRef idx="3">
-            <a:schemeClr val="accent1"/>
-          </a:fillRef>
-          <a:effectRef idx="2">
-            <a:schemeClr val="accent1"/>
-          </a:effectRef>
-          <a:fontRef idx="minor">
-            <a:schemeClr val="lt1"/>
-          </a:fontRef>
-        </p:style>
-        <p:txBody>
-          <a:bodyPr rtlCol="0" anchor="ctr"/>
-          <a:lstStyle/>
-          <a:p>
-            <a:pPr algn="ctr"/>
-          </a:p>
-        </p:txBody>
-      </p:sp>
-      <p:sp>
-        <p:nvSpPr>
-          <p:cNvPr id="52" name="Oval 51"/>
-          <p:cNvSpPr/>
-          <p:nvPr/>
-        </p:nvSpPr>
-        <p:spPr>
-          <a:xfrm>
-            <a:off x="5312664" y="3355848"/>
-            <a:ext cx="274320" cy="274320"/>
-          </a:xfrm>
-          <a:prstGeom prst="ellipse">
-            <a:avLst/>
-          </a:prstGeom>
-          <a:solidFill>
-            <a:srgbClr val="FFFFFF"/>
-          </a:solidFill>
-          <a:ln w="9525">
-            <a:solidFill>
-              <a:srgbClr val="C8D2DD"/>
-            </a:solidFill>
-          </a:ln>
-          <a:effectLst/>
-        </p:spPr>
-        <p:style>
-          <a:lnRef idx="1">
-            <a:schemeClr val="accent1"/>
-          </a:lnRef>
-          <a:fillRef idx="3">
-            <a:schemeClr val="accent1"/>
-          </a:fillRef>
-          <a:effectRef idx="2">
-            <a:schemeClr val="accent1"/>
-          </a:effectRef>
-          <a:fontRef idx="minor">
-            <a:schemeClr val="lt1"/>
-          </a:fontRef>
-        </p:style>
-        <p:txBody>
-          <a:bodyPr rtlCol="0" anchor="ctr" wrap="square"/>
-          <a:lstStyle/>
-          <a:p>
-            <a:pPr algn="ctr"/>
-          </a:p>
-        </p:txBody>
-      </p:sp>
-      <p:sp>
-        <p:nvSpPr>
-          <p:cNvPr id="53" name="Oval 52"/>
-          <p:cNvSpPr/>
-          <p:nvPr/>
-        </p:nvSpPr>
-        <p:spPr>
-          <a:xfrm>
-            <a:off x="5372100" y="3415284"/>
-            <a:ext cx="155448" cy="155448"/>
-          </a:xfrm>
-          <a:prstGeom prst="ellipse">
-            <a:avLst/>
-          </a:prstGeom>
-          <a:noFill/>
-          <a:ln w="12700">
-            <a:solidFill>
-              <a:srgbClr val="243EB5"/>
-            </a:solidFill>
-          </a:ln>
-          <a:effectLst/>
-        </p:spPr>
-        <p:style>
-          <a:lnRef idx="1">
-            <a:schemeClr val="accent1"/>
-          </a:lnRef>
-          <a:fillRef idx="3">
-            <a:schemeClr val="accent1"/>
-          </a:fillRef>
-          <a:effectRef idx="2">
-            <a:schemeClr val="accent1"/>
-          </a:effectRef>
-          <a:fontRef idx="minor">
-            <a:schemeClr val="lt1"/>
-          </a:fontRef>
-        </p:style>
-        <p:txBody>
-          <a:bodyPr rtlCol="0" anchor="ctr" wrap="square"/>
-          <a:lstStyle/>
-          <a:p>
-            <a:pPr algn="ctr"/>
-          </a:p>
-        </p:txBody>
-      </p:sp>
-      <p:sp>
-        <p:nvSpPr>
-          <p:cNvPr id="54" name="Oval 53"/>
-          <p:cNvSpPr/>
-          <p:nvPr/>
-        </p:nvSpPr>
-        <p:spPr>
-          <a:xfrm>
-            <a:off x="5410962" y="3454146"/>
-            <a:ext cx="77724" cy="77724"/>
-          </a:xfrm>
-          <a:prstGeom prst="ellipse">
-            <a:avLst/>
-          </a:prstGeom>
-          <a:noFill/>
-          <a:ln w="12700">
-            <a:solidFill>
-              <a:srgbClr val="243EB5"/>
-            </a:solidFill>
-          </a:ln>
-          <a:effectLst/>
-        </p:spPr>
-        <p:style>
-          <a:lnRef idx="1">
-            <a:schemeClr val="accent1"/>
-          </a:lnRef>
-          <a:fillRef idx="3">
-            <a:schemeClr val="accent1"/>
-          </a:fillRef>
-          <a:effectRef idx="2">
-            <a:schemeClr val="accent1"/>
-          </a:effectRef>
-          <a:fontRef idx="minor">
-            <a:schemeClr val="lt1"/>
-          </a:fontRef>
-        </p:style>
-        <p:txBody>
-          <a:bodyPr rtlCol="0" anchor="ctr" wrap="square"/>
-          <a:lstStyle/>
-          <a:p>
-            <a:pPr algn="ctr"/>
-          </a:p>
-        </p:txBody>
-      </p:sp>
-      <p:sp>
-        <p:nvSpPr>
-          <p:cNvPr id="55" name="Oval 54"/>
-          <p:cNvSpPr/>
-          <p:nvPr/>
-        </p:nvSpPr>
-        <p:spPr>
-          <a:xfrm>
-            <a:off x="5437388" y="3480572"/>
-            <a:ext cx="24871" cy="24871"/>
-          </a:xfrm>
-          <a:prstGeom prst="ellipse">
-            <a:avLst/>
-          </a:prstGeom>
-          <a:solidFill>
-            <a:srgbClr val="243EB5"/>
-          </a:solidFill>
-          <a:ln>
-            <a:noFill/>
-          </a:ln>
-          <a:effectLst/>
-        </p:spPr>
-        <p:style>
-          <a:lnRef idx="1">
-            <a:schemeClr val="accent1"/>
-          </a:lnRef>
-          <a:fillRef idx="3">
-            <a:schemeClr val="accent1"/>
-          </a:fillRef>
-          <a:effectRef idx="2">
-            <a:schemeClr val="accent1"/>
-          </a:effectRef>
-          <a:fontRef idx="minor">
-            <a:schemeClr val="lt1"/>
-          </a:fontRef>
-        </p:style>
-        <p:txBody>
-          <a:bodyPr rtlCol="0" anchor="ctr" wrap="square"/>
-          <a:lstStyle/>
-          <a:p>
-            <a:pPr algn="ctr"/>
-          </a:p>
-        </p:txBody>
-      </p:sp>
-      <p:sp>
-        <p:nvSpPr>
-          <p:cNvPr id="56" name="TextBox 55"/>
-          <p:cNvSpPr txBox="1"/>
-          <p:nvPr/>
-        </p:nvSpPr>
-        <p:spPr>
-          <a:xfrm>
-            <a:off x="5715000" y="3273552"/>
-            <a:ext cx="4663440" cy="438912"/>
-          </a:xfrm>
-          <a:prstGeom prst="rect">
-            <a:avLst/>
-          </a:prstGeom>
-          <a:noFill/>
-        </p:spPr>
-        <p:txBody>
-          <a:bodyPr wrap="square" lIns="0" rIns="0" tIns="0" bIns="0" anchor="ctr">
-            <a:spAutoFit/>
-          </a:bodyPr>
-          <a:lstStyle/>
-          <a:p>
-            <a:pPr algn="l">
-              <a:spcAft>
-                <a:spcPts val="0"/>
-              </a:spcAft>
-            </a:pPr>
-            <a:r>
-              <a:rPr sz="950" b="0">
-                <a:solidFill>
-                  <a:srgbClr val="000000"/>
-                </a:solidFill>
-                <a:latin typeface="Aptos"/>
-              </a:rPr>
-              <a:t>Who decides what, how fast, and where it escalates</a:t>
-            </a:r>
-          </a:p>
-        </p:txBody>
-      </p:sp>
-      <p:sp>
-        <p:nvSpPr>
-          <p:cNvPr id="57" name="Rounded Rectangle 56"/>
-          <p:cNvSpPr/>
-          <p:nvPr/>
-        </p:nvSpPr>
-        <p:spPr>
-          <a:xfrm>
-            <a:off x="2240280" y="2798064"/>
-            <a:ext cx="8595360" cy="438912"/>
-          </a:xfrm>
-          <a:prstGeom prst="roundRect">
-            <a:avLst>
-              <a:gd name="adj" fmla="val 16000"/>
-            </a:avLst>
-          </a:prstGeom>
-          <a:solidFill>
-            <a:srgbClr val="FFFFFF"/>
-          </a:solidFill>
-          <a:ln w="9525">
-            <a:solidFill>
-              <a:srgbClr val="C8D2DD"/>
-            </a:solidFill>
-          </a:ln>
-          <a:effectLst/>
-        </p:spPr>
-        <p:style>
-          <a:lnRef idx="1">
-            <a:schemeClr val="accent1"/>
-          </a:lnRef>
-          <a:fillRef idx="3">
-            <a:schemeClr val="accent1"/>
-          </a:fillRef>
-          <a:effectRef idx="2">
-            <a:schemeClr val="accent1"/>
-          </a:effectRef>
-          <a:fontRef idx="minor">
-            <a:schemeClr val="lt1"/>
-          </a:fontRef>
-        </p:style>
-        <p:txBody>
-          <a:bodyPr rtlCol="0" anchor="ctr" wrap="square"/>
-          <a:lstStyle/>
-          <a:p>
-            <a:pPr algn="ctr"/>
-          </a:p>
-        </p:txBody>
-      </p:sp>
-      <p:sp>
-        <p:nvSpPr>
-          <p:cNvPr id="58" name="Rounded Rectangle 57"/>
-          <p:cNvSpPr/>
-          <p:nvPr/>
-        </p:nvSpPr>
-        <p:spPr>
-          <a:xfrm>
-            <a:off x="2240280" y="2798064"/>
-            <a:ext cx="64008" cy="438912"/>
-          </a:xfrm>
-          <a:prstGeom prst="roundRect">
-            <a:avLst>
-              <a:gd name="adj" fmla="val 50000"/>
-            </a:avLst>
-          </a:prstGeom>
-          <a:solidFill>
-            <a:srgbClr val="1D49C2"/>
-          </a:solidFill>
-          <a:ln>
-            <a:noFill/>
-          </a:ln>
-          <a:effectLst/>
-        </p:spPr>
-        <p:style>
-          <a:lnRef idx="1">
-            <a:schemeClr val="accent1"/>
-          </a:lnRef>
-          <a:fillRef idx="3">
-            <a:schemeClr val="accent1"/>
-          </a:fillRef>
-          <a:effectRef idx="2">
-            <a:schemeClr val="accent1"/>
-          </a:effectRef>
-          <a:fontRef idx="minor">
-            <a:schemeClr val="lt1"/>
-          </a:fontRef>
-        </p:style>
-        <p:txBody>
-          <a:bodyPr rtlCol="0" anchor="ctr" wrap="square"/>
-          <a:lstStyle/>
-          <a:p>
-            <a:pPr algn="ctr"/>
-          </a:p>
-        </p:txBody>
-      </p:sp>
-      <p:sp>
-        <p:nvSpPr>
-          <p:cNvPr id="59" name="Oval 58"/>
-          <p:cNvSpPr/>
-          <p:nvPr/>
-        </p:nvSpPr>
-        <p:spPr>
-          <a:xfrm>
-            <a:off x="2404872" y="2862072"/>
-            <a:ext cx="310896" cy="310896"/>
-          </a:xfrm>
-          <a:prstGeom prst="ellipse">
-            <a:avLst/>
-          </a:prstGeom>
-          <a:solidFill>
-            <a:srgbClr val="1D49C2"/>
-          </a:solidFill>
-          <a:ln>
-            <a:noFill/>
-          </a:ln>
-          <a:effectLst/>
-        </p:spPr>
-        <p:style>
-          <a:lnRef idx="1">
-            <a:schemeClr val="accent1"/>
-          </a:lnRef>
-          <a:fillRef idx="3">
-            <a:schemeClr val="accent1"/>
-          </a:fillRef>
-          <a:effectRef idx="2">
-            <a:schemeClr val="accent1"/>
-          </a:effectRef>
-          <a:fontRef idx="minor">
-            <a:schemeClr val="lt1"/>
-          </a:fontRef>
-        </p:style>
-        <p:txBody>
-          <a:bodyPr rtlCol="0" anchor="ctr" wrap="square" lIns="54864" rIns="54864" tIns="0" bIns="0"/>
-          <a:lstStyle/>
-          <a:p>
-            <a:pPr algn="ctr">
-              <a:lnSpc>
-                <a:spcPct val="98000"/>
-              </a:lnSpc>
-              <a:spcAft>
-                <a:spcPts val="0"/>
-              </a:spcAft>
-            </a:pPr>
-            <a:r>
-              <a:rPr sz="1200" b="1">
-                <a:solidFill>
-                  <a:srgbClr val="FFFFFF"/>
-                </a:solidFill>
-                <a:latin typeface="Aptos"/>
-              </a:rPr>
-              <a:t>6</a:t>
-            </a:r>
-          </a:p>
-        </p:txBody>
-      </p:sp>
-      <p:sp>
-        <p:nvSpPr>
-          <p:cNvPr id="60" name="TextBox 59"/>
-          <p:cNvSpPr txBox="1"/>
-          <p:nvPr/>
-        </p:nvSpPr>
-        <p:spPr>
-          <a:xfrm>
-            <a:off x="2825496" y="2798064"/>
-            <a:ext cx="2560320" cy="438912"/>
-          </a:xfrm>
-          <a:prstGeom prst="rect">
-            <a:avLst/>
-          </a:prstGeom>
-          <a:noFill/>
-        </p:spPr>
-        <p:txBody>
-          <a:bodyPr wrap="square" lIns="0" rIns="0" tIns="0" bIns="0" anchor="ctr">
-            <a:spAutoFit/>
-          </a:bodyPr>
-          <a:lstStyle/>
-          <a:p>
-            <a:pPr algn="l">
-              <a:spcAft>
-                <a:spcPts val="0"/>
-              </a:spcAft>
-            </a:pPr>
-            <a:r>
-              <a:rPr sz="1050" b="1">
-                <a:solidFill>
-                  <a:srgbClr val="1D49C2"/>
-                </a:solidFill>
-                <a:latin typeface="Aptos"/>
-              </a:rPr>
-              <a:t>ISD in few accounts</a:t>
-            </a:r>
-          </a:p>
-        </p:txBody>
-      </p:sp>
-      <p:sp>
-        <p:nvSpPr>
-          <p:cNvPr id="61" name="Freeform 60"/>
-          <p:cNvSpPr/>
-          <p:nvPr/>
-        </p:nvSpPr>
-        <p:spPr>
-          <a:xfrm>
-            <a:off x="5440680" y="2889504"/>
-            <a:ext cx="0" cy="256032"/>
-          </a:xfrm>
-          <a:custGeom>
-            <a:avLst/>
-            <a:gdLst/>
-            <a:ahLst/>
-            <a:cxnLst/>
-            <a:rect l="l" t="t" r="r" b="b"/>
-            <a:pathLst>
-              <a:path w="0" h="256032">
-                <a:moveTo>
-                  <a:pt x="0" y="0"/>
-                </a:moveTo>
-                <a:lnTo>
-                  <a:pt x="0" y="256032"/>
-                </a:lnTo>
-              </a:path>
-            </a:pathLst>
-          </a:custGeom>
-          <a:noFill/>
-          <a:ln w="9525">
-            <a:solidFill>
-              <a:srgbClr val="C8D2DD"/>
-            </a:solidFill>
-          </a:ln>
-          <a:effectLst/>
-        </p:spPr>
-        <p:style>
-          <a:lnRef idx="1">
-            <a:schemeClr val="accent1"/>
-          </a:lnRef>
-          <a:fillRef idx="3">
-            <a:schemeClr val="accent1"/>
-          </a:fillRef>
-          <a:effectRef idx="2">
-            <a:schemeClr val="accent1"/>
-          </a:effectRef>
-          <a:fontRef idx="minor">
-            <a:schemeClr val="lt1"/>
-          </a:fontRef>
-        </p:style>
-        <p:txBody>
-          <a:bodyPr rtlCol="0" anchor="ctr"/>
-          <a:lstStyle/>
-          <a:p>
-            <a:pPr algn="ctr"/>
-          </a:p>
-        </p:txBody>
-      </p:sp>
-      <p:sp>
-        <p:nvSpPr>
-          <p:cNvPr id="62" name="Oval 61"/>
-          <p:cNvSpPr/>
-          <p:nvPr/>
-        </p:nvSpPr>
-        <p:spPr>
-          <a:xfrm>
-            <a:off x="5586984" y="2880360"/>
-            <a:ext cx="274320" cy="274320"/>
-          </a:xfrm>
-          <a:prstGeom prst="ellipse">
-            <a:avLst/>
-          </a:prstGeom>
-          <a:solidFill>
-            <a:srgbClr val="FFFFFF"/>
-          </a:solidFill>
-          <a:ln w="9525">
-            <a:solidFill>
-              <a:srgbClr val="C8D2DD"/>
-            </a:solidFill>
-          </a:ln>
-          <a:effectLst/>
-        </p:spPr>
-        <p:style>
-          <a:lnRef idx="1">
-            <a:schemeClr val="accent1"/>
-          </a:lnRef>
-          <a:fillRef idx="3">
-            <a:schemeClr val="accent1"/>
-          </a:fillRef>
-          <a:effectRef idx="2">
-            <a:schemeClr val="accent1"/>
-          </a:effectRef>
-          <a:fontRef idx="minor">
-            <a:schemeClr val="lt1"/>
-          </a:fontRef>
-        </p:style>
-        <p:txBody>
-          <a:bodyPr rtlCol="0" anchor="ctr" wrap="square"/>
-          <a:lstStyle/>
-          <a:p>
-            <a:pPr algn="ctr"/>
-          </a:p>
-        </p:txBody>
-      </p:sp>
-      <p:sp>
-        <p:nvSpPr>
-          <p:cNvPr id="63" name="Oval 62"/>
-          <p:cNvSpPr/>
-          <p:nvPr/>
-        </p:nvSpPr>
-        <p:spPr>
-          <a:xfrm>
-            <a:off x="5649528" y="2970885"/>
-            <a:ext cx="93268" cy="93268"/>
-          </a:xfrm>
-          <a:prstGeom prst="ellipse">
-            <a:avLst/>
-          </a:prstGeom>
-          <a:noFill/>
-          <a:ln w="12700">
-            <a:solidFill>
-              <a:srgbClr val="1D49C2"/>
-            </a:solidFill>
-          </a:ln>
-          <a:effectLst/>
-        </p:spPr>
-        <p:style>
-          <a:lnRef idx="1">
-            <a:schemeClr val="accent1"/>
-          </a:lnRef>
-          <a:fillRef idx="3">
-            <a:schemeClr val="accent1"/>
-          </a:fillRef>
-          <a:effectRef idx="2">
-            <a:schemeClr val="accent1"/>
-          </a:effectRef>
-          <a:fontRef idx="minor">
-            <a:schemeClr val="lt1"/>
-          </a:fontRef>
-        </p:style>
-        <p:txBody>
-          <a:bodyPr rtlCol="0" anchor="ctr" wrap="square"/>
-          <a:lstStyle/>
-          <a:p>
-            <a:pPr algn="ctr"/>
-          </a:p>
-        </p:txBody>
-      </p:sp>
-      <p:sp>
-        <p:nvSpPr>
-          <p:cNvPr id="64" name="Oval 63"/>
-          <p:cNvSpPr/>
-          <p:nvPr/>
-        </p:nvSpPr>
-        <p:spPr>
-          <a:xfrm>
-            <a:off x="5705490" y="2970885"/>
-            <a:ext cx="93268" cy="93268"/>
-          </a:xfrm>
-          <a:prstGeom prst="ellipse">
-            <a:avLst/>
-          </a:prstGeom>
-          <a:noFill/>
-          <a:ln w="12700">
-            <a:solidFill>
-              <a:srgbClr val="1D49C2"/>
-            </a:solidFill>
-          </a:ln>
-          <a:effectLst/>
-        </p:spPr>
-        <p:style>
-          <a:lnRef idx="1">
-            <a:schemeClr val="accent1"/>
-          </a:lnRef>
-          <a:fillRef idx="3">
-            <a:schemeClr val="accent1"/>
-          </a:fillRef>
-          <a:effectRef idx="2">
-            <a:schemeClr val="accent1"/>
-          </a:effectRef>
-          <a:fontRef idx="minor">
-            <a:schemeClr val="lt1"/>
-          </a:fontRef>
-        </p:style>
-        <p:txBody>
-          <a:bodyPr rtlCol="0" anchor="ctr" wrap="square"/>
-          <a:lstStyle/>
-          <a:p>
-            <a:pPr algn="ctr"/>
-          </a:p>
-        </p:txBody>
-      </p:sp>
-      <p:sp>
-        <p:nvSpPr>
-          <p:cNvPr id="65" name="TextBox 64"/>
-          <p:cNvSpPr txBox="1"/>
-          <p:nvPr/>
-        </p:nvSpPr>
-        <p:spPr>
-          <a:xfrm>
-            <a:off x="5989320" y="2798064"/>
-            <a:ext cx="4663440" cy="438912"/>
-          </a:xfrm>
-          <a:prstGeom prst="rect">
-            <a:avLst/>
-          </a:prstGeom>
-          <a:noFill/>
-        </p:spPr>
-        <p:txBody>
-          <a:bodyPr wrap="square" lIns="0" rIns="0" tIns="0" bIns="0" anchor="ctr">
-            <a:spAutoFit/>
-          </a:bodyPr>
-          <a:lstStyle/>
-          <a:p>
-            <a:pPr algn="l">
-              <a:spcAft>
-                <a:spcPts val="0"/>
-              </a:spcAft>
-            </a:pPr>
-            <a:r>
-              <a:rPr sz="950" b="0">
-                <a:solidFill>
-                  <a:srgbClr val="000000"/>
-                </a:solidFill>
-                <a:latin typeface="Aptos"/>
-              </a:rPr>
-              <a:t>Drive integrated solution delivery in strategic accounts</a:t>
-            </a:r>
-          </a:p>
-        </p:txBody>
-      </p:sp>
-      <p:sp>
-        <p:nvSpPr>
-          <p:cNvPr id="66" name="Rounded Rectangle 65"/>
-          <p:cNvSpPr/>
-          <p:nvPr/>
-        </p:nvSpPr>
-        <p:spPr>
-          <a:xfrm>
-            <a:off x="2514600" y="2322576"/>
-            <a:ext cx="8595360" cy="438912"/>
-          </a:xfrm>
-          <a:prstGeom prst="roundRect">
-            <a:avLst>
-              <a:gd name="adj" fmla="val 16000"/>
-            </a:avLst>
-          </a:prstGeom>
-          <a:solidFill>
-            <a:srgbClr val="E6EBF5"/>
-          </a:solidFill>
-          <a:ln w="9525">
-            <a:solidFill>
-              <a:srgbClr val="C8D2DD"/>
-            </a:solidFill>
-          </a:ln>
-          <a:effectLst/>
-        </p:spPr>
-        <p:style>
-          <a:lnRef idx="1">
-            <a:schemeClr val="accent1"/>
-          </a:lnRef>
-          <a:fillRef idx="3">
-            <a:schemeClr val="accent1"/>
-          </a:fillRef>
-          <a:effectRef idx="2">
-            <a:schemeClr val="accent1"/>
-          </a:effectRef>
-          <a:fontRef idx="minor">
-            <a:schemeClr val="lt1"/>
-          </a:fontRef>
-        </p:style>
-        <p:txBody>
-          <a:bodyPr rtlCol="0" anchor="ctr" wrap="square"/>
-          <a:lstStyle/>
-          <a:p>
-            <a:pPr algn="ctr"/>
-          </a:p>
-        </p:txBody>
-      </p:sp>
-      <p:sp>
-        <p:nvSpPr>
-          <p:cNvPr id="67" name="Rounded Rectangle 66"/>
-          <p:cNvSpPr/>
-          <p:nvPr/>
-        </p:nvSpPr>
-        <p:spPr>
-          <a:xfrm>
-            <a:off x="2514600" y="2322576"/>
-            <a:ext cx="64008" cy="438912"/>
-          </a:xfrm>
-          <a:prstGeom prst="roundRect">
-            <a:avLst>
-              <a:gd name="adj" fmla="val 50000"/>
-            </a:avLst>
-          </a:prstGeom>
-          <a:solidFill>
-            <a:srgbClr val="1654CF"/>
-          </a:solidFill>
-          <a:ln>
-            <a:noFill/>
-          </a:ln>
-          <a:effectLst/>
-        </p:spPr>
-        <p:style>
-          <a:lnRef idx="1">
-            <a:schemeClr val="accent1"/>
-          </a:lnRef>
-          <a:fillRef idx="3">
-            <a:schemeClr val="accent1"/>
-          </a:fillRef>
-          <a:effectRef idx="2">
-            <a:schemeClr val="accent1"/>
-          </a:effectRef>
-          <a:fontRef idx="minor">
-            <a:schemeClr val="lt1"/>
-          </a:fontRef>
-        </p:style>
-        <p:txBody>
-          <a:bodyPr rtlCol="0" anchor="ctr" wrap="square"/>
-          <a:lstStyle/>
-          <a:p>
-            <a:pPr algn="ctr"/>
-          </a:p>
-        </p:txBody>
-      </p:sp>
-      <p:sp>
-        <p:nvSpPr>
-          <p:cNvPr id="68" name="Oval 67"/>
-          <p:cNvSpPr/>
-          <p:nvPr/>
-        </p:nvSpPr>
-        <p:spPr>
-          <a:xfrm>
-            <a:off x="2679192" y="2386584"/>
-            <a:ext cx="310896" cy="310896"/>
-          </a:xfrm>
-          <a:prstGeom prst="ellipse">
-            <a:avLst/>
-          </a:prstGeom>
-          <a:solidFill>
-            <a:srgbClr val="1654CF"/>
-          </a:solidFill>
-          <a:ln>
-            <a:noFill/>
-          </a:ln>
-          <a:effectLst/>
-        </p:spPr>
-        <p:style>
-          <a:lnRef idx="1">
-            <a:schemeClr val="accent1"/>
-          </a:lnRef>
-          <a:fillRef idx="3">
-            <a:schemeClr val="accent1"/>
-          </a:fillRef>
-          <a:effectRef idx="2">
-            <a:schemeClr val="accent1"/>
-          </a:effectRef>
-          <a:fontRef idx="minor">
-            <a:schemeClr val="lt1"/>
-          </a:fontRef>
-        </p:style>
-        <p:txBody>
-          <a:bodyPr rtlCol="0" anchor="ctr" wrap="square" lIns="54864" rIns="54864" tIns="0" bIns="0"/>
-          <a:lstStyle/>
-          <a:p>
-            <a:pPr algn="ctr">
-              <a:lnSpc>
-                <a:spcPct val="98000"/>
-              </a:lnSpc>
-              <a:spcAft>
-                <a:spcPts val="0"/>
-              </a:spcAft>
-            </a:pPr>
-            <a:r>
-              <a:rPr sz="1200" b="1">
-                <a:solidFill>
-                  <a:srgbClr val="FFFFFF"/>
-                </a:solidFill>
-                <a:latin typeface="Aptos"/>
-              </a:rPr>
-              <a:t>7</a:t>
-            </a:r>
-          </a:p>
-        </p:txBody>
-      </p:sp>
-      <p:sp>
-        <p:nvSpPr>
-          <p:cNvPr id="69" name="TextBox 68"/>
-          <p:cNvSpPr txBox="1"/>
-          <p:nvPr/>
-        </p:nvSpPr>
-        <p:spPr>
-          <a:xfrm>
-            <a:off x="3099816" y="2322576"/>
-            <a:ext cx="2560320" cy="438912"/>
-          </a:xfrm>
-          <a:prstGeom prst="rect">
-            <a:avLst/>
-          </a:prstGeom>
-          <a:noFill/>
-        </p:spPr>
-        <p:txBody>
-          <a:bodyPr wrap="square" lIns="0" rIns="0" tIns="0" bIns="0" anchor="ctr">
-            <a:spAutoFit/>
-          </a:bodyPr>
-          <a:lstStyle/>
-          <a:p>
-            <a:pPr algn="l">
-              <a:spcAft>
-                <a:spcPts val="0"/>
-              </a:spcAft>
-            </a:pPr>
-            <a:r>
-              <a:rPr sz="1050" b="1">
-                <a:solidFill>
-                  <a:srgbClr val="1654CF"/>
-                </a:solidFill>
-                <a:latin typeface="Aptos"/>
-              </a:rPr>
-              <a:t>Transformation direct reporting</a:t>
-            </a:r>
-          </a:p>
-        </p:txBody>
-      </p:sp>
-      <p:sp>
-        <p:nvSpPr>
-          <p:cNvPr id="70" name="Freeform 69"/>
-          <p:cNvSpPr/>
-          <p:nvPr/>
-        </p:nvSpPr>
-        <p:spPr>
-          <a:xfrm>
-            <a:off x="5715000" y="2414016"/>
-            <a:ext cx="0" cy="256032"/>
-          </a:xfrm>
-          <a:custGeom>
-            <a:avLst/>
-            <a:gdLst/>
-            <a:ahLst/>
-            <a:cxnLst/>
-            <a:rect l="l" t="t" r="r" b="b"/>
-            <a:pathLst>
-              <a:path w="0" h="256032">
-                <a:moveTo>
-                  <a:pt x="0" y="0"/>
-                </a:moveTo>
-                <a:lnTo>
-                  <a:pt x="0" y="256032"/>
-                </a:lnTo>
-              </a:path>
-            </a:pathLst>
-          </a:custGeom>
-          <a:noFill/>
-          <a:ln w="9525">
-            <a:solidFill>
-              <a:srgbClr val="C8D2DD"/>
-            </a:solidFill>
-          </a:ln>
-          <a:effectLst/>
-        </p:spPr>
-        <p:style>
-          <a:lnRef idx="1">
-            <a:schemeClr val="accent1"/>
-          </a:lnRef>
-          <a:fillRef idx="3">
-            <a:schemeClr val="accent1"/>
-          </a:fillRef>
-          <a:effectRef idx="2">
-            <a:schemeClr val="accent1"/>
-          </a:effectRef>
-          <a:fontRef idx="minor">
-            <a:schemeClr val="lt1"/>
-          </a:fontRef>
-        </p:style>
-        <p:txBody>
-          <a:bodyPr rtlCol="0" anchor="ctr"/>
-          <a:lstStyle/>
-          <a:p>
-            <a:pPr algn="ctr"/>
-          </a:p>
-        </p:txBody>
-      </p:sp>
-      <p:sp>
-        <p:nvSpPr>
-          <p:cNvPr id="71" name="Oval 70"/>
-          <p:cNvSpPr/>
-          <p:nvPr/>
-        </p:nvSpPr>
-        <p:spPr>
-          <a:xfrm>
-            <a:off x="5861304" y="2404872"/>
-            <a:ext cx="274320" cy="274320"/>
-          </a:xfrm>
-          <a:prstGeom prst="ellipse">
-            <a:avLst/>
-          </a:prstGeom>
-          <a:solidFill>
-            <a:srgbClr val="FFFFFF"/>
-          </a:solidFill>
-          <a:ln w="9525">
-            <a:solidFill>
-              <a:srgbClr val="C8D2DD"/>
-            </a:solidFill>
-          </a:ln>
-          <a:effectLst/>
-        </p:spPr>
-        <p:style>
-          <a:lnRef idx="1">
-            <a:schemeClr val="accent1"/>
-          </a:lnRef>
-          <a:fillRef idx="3">
-            <a:schemeClr val="accent1"/>
-          </a:fillRef>
-          <a:effectRef idx="2">
-            <a:schemeClr val="accent1"/>
-          </a:effectRef>
-          <a:fontRef idx="minor">
-            <a:schemeClr val="lt1"/>
-          </a:fontRef>
-        </p:style>
-        <p:txBody>
-          <a:bodyPr rtlCol="0" anchor="ctr" wrap="square"/>
-          <a:lstStyle/>
-          <a:p>
-            <a:pPr algn="ctr"/>
-          </a:p>
-        </p:txBody>
-      </p:sp>
-      <p:sp>
-        <p:nvSpPr>
-          <p:cNvPr id="72" name="Oval 71"/>
-          <p:cNvSpPr/>
-          <p:nvPr/>
-        </p:nvSpPr>
-        <p:spPr>
-          <a:xfrm>
-            <a:off x="5981364" y="2470525"/>
-            <a:ext cx="34198" cy="34198"/>
-          </a:xfrm>
-          <a:prstGeom prst="ellipse">
-            <a:avLst/>
-          </a:prstGeom>
-          <a:solidFill>
-            <a:srgbClr val="1654CF"/>
-          </a:solidFill>
-          <a:ln>
-            <a:noFill/>
-          </a:ln>
-          <a:effectLst/>
-        </p:spPr>
-        <p:style>
-          <a:lnRef idx="1">
-            <a:schemeClr val="accent1"/>
-          </a:lnRef>
-          <a:fillRef idx="3">
-            <a:schemeClr val="accent1"/>
-          </a:fillRef>
-          <a:effectRef idx="2">
-            <a:schemeClr val="accent1"/>
-          </a:effectRef>
-          <a:fontRef idx="minor">
-            <a:schemeClr val="lt1"/>
-          </a:fontRef>
-        </p:style>
-        <p:txBody>
-          <a:bodyPr rtlCol="0" anchor="ctr" wrap="square"/>
-          <a:lstStyle/>
-          <a:p>
-            <a:pPr algn="ctr"/>
-          </a:p>
-        </p:txBody>
-      </p:sp>
-      <p:sp>
-        <p:nvSpPr>
-          <p:cNvPr id="73" name="Oval 72"/>
-          <p:cNvSpPr/>
-          <p:nvPr/>
-        </p:nvSpPr>
-        <p:spPr>
-          <a:xfrm>
-            <a:off x="5936284" y="2573121"/>
-            <a:ext cx="34198" cy="34198"/>
-          </a:xfrm>
-          <a:prstGeom prst="ellipse">
-            <a:avLst/>
-          </a:prstGeom>
-          <a:solidFill>
-            <a:srgbClr val="1654CF"/>
-          </a:solidFill>
-          <a:ln>
-            <a:noFill/>
-          </a:ln>
-          <a:effectLst/>
-        </p:spPr>
-        <p:style>
-          <a:lnRef idx="1">
-            <a:schemeClr val="accent1"/>
-          </a:lnRef>
-          <a:fillRef idx="3">
-            <a:schemeClr val="accent1"/>
-          </a:fillRef>
-          <a:effectRef idx="2">
-            <a:schemeClr val="accent1"/>
-          </a:effectRef>
-          <a:fontRef idx="minor">
-            <a:schemeClr val="lt1"/>
-          </a:fontRef>
-        </p:style>
-        <p:txBody>
-          <a:bodyPr rtlCol="0" anchor="ctr" wrap="square"/>
-          <a:lstStyle/>
-          <a:p>
-            <a:pPr algn="ctr"/>
-          </a:p>
-        </p:txBody>
-      </p:sp>
-      <p:sp>
-        <p:nvSpPr>
-          <p:cNvPr id="74" name="Oval 73"/>
-          <p:cNvSpPr/>
-          <p:nvPr/>
-        </p:nvSpPr>
-        <p:spPr>
-          <a:xfrm>
-            <a:off x="6026444" y="2573121"/>
-            <a:ext cx="34198" cy="34198"/>
-          </a:xfrm>
-          <a:prstGeom prst="ellipse">
-            <a:avLst/>
-          </a:prstGeom>
-          <a:solidFill>
-            <a:srgbClr val="1654CF"/>
-          </a:solidFill>
-          <a:ln>
-            <a:noFill/>
-          </a:ln>
-          <a:effectLst/>
-        </p:spPr>
-        <p:style>
-          <a:lnRef idx="1">
-            <a:schemeClr val="accent1"/>
-          </a:lnRef>
-          <a:fillRef idx="3">
-            <a:schemeClr val="accent1"/>
-          </a:fillRef>
-          <a:effectRef idx="2">
-            <a:schemeClr val="accent1"/>
-          </a:effectRef>
-          <a:fontRef idx="minor">
-            <a:schemeClr val="lt1"/>
-          </a:fontRef>
-        </p:style>
-        <p:txBody>
-          <a:bodyPr rtlCol="0" anchor="ctr" wrap="square"/>
-          <a:lstStyle/>
-          <a:p>
-            <a:pPr algn="ctr"/>
-          </a:p>
-        </p:txBody>
-      </p:sp>
-      <p:sp>
-        <p:nvSpPr>
-          <p:cNvPr id="75" name="Freeform 74"/>
-          <p:cNvSpPr/>
-          <p:nvPr/>
-        </p:nvSpPr>
-        <p:spPr>
-          <a:xfrm>
-            <a:off x="5953384" y="2510942"/>
-            <a:ext cx="45080" cy="65288"/>
-          </a:xfrm>
-          <a:custGeom>
-            <a:avLst/>
-            <a:gdLst/>
-            <a:ahLst/>
-            <a:cxnLst/>
-            <a:rect l="l" t="t" r="r" b="b"/>
-            <a:pathLst>
-              <a:path w="45080" h="65288">
-                <a:moveTo>
-                  <a:pt x="45080" y="0"/>
-                </a:moveTo>
-                <a:lnTo>
-                  <a:pt x="0" y="65288"/>
-                </a:lnTo>
-              </a:path>
-            </a:pathLst>
-          </a:custGeom>
-          <a:noFill/>
-          <a:ln w="10160">
-            <a:solidFill>
-              <a:srgbClr val="1654CF"/>
-            </a:solidFill>
-          </a:ln>
-          <a:effectLst/>
-        </p:spPr>
-        <p:style>
-          <a:lnRef idx="1">
-            <a:schemeClr val="accent1"/>
-          </a:lnRef>
-          <a:fillRef idx="3">
-            <a:schemeClr val="accent1"/>
-          </a:fillRef>
-          <a:effectRef idx="2">
-            <a:schemeClr val="accent1"/>
-          </a:effectRef>
-          <a:fontRef idx="minor">
-            <a:schemeClr val="lt1"/>
-          </a:fontRef>
-        </p:style>
-        <p:txBody>
-          <a:bodyPr rtlCol="0" anchor="ctr"/>
-          <a:lstStyle/>
-          <a:p>
-            <a:pPr algn="ctr"/>
-          </a:p>
-        </p:txBody>
-      </p:sp>
-      <p:sp>
-        <p:nvSpPr>
-          <p:cNvPr id="76" name="Freeform 75"/>
-          <p:cNvSpPr/>
-          <p:nvPr/>
-        </p:nvSpPr>
-        <p:spPr>
-          <a:xfrm>
-            <a:off x="5998464" y="2510942"/>
-            <a:ext cx="45079" cy="65288"/>
-          </a:xfrm>
-          <a:custGeom>
-            <a:avLst/>
-            <a:gdLst/>
-            <a:ahLst/>
-            <a:cxnLst/>
-            <a:rect l="l" t="t" r="r" b="b"/>
-            <a:pathLst>
-              <a:path w="45079" h="65288">
-                <a:moveTo>
-                  <a:pt x="0" y="0"/>
-                </a:moveTo>
-                <a:lnTo>
-                  <a:pt x="45079" y="65288"/>
-                </a:lnTo>
-              </a:path>
-            </a:pathLst>
-          </a:custGeom>
-          <a:noFill/>
-          <a:ln w="10160">
-            <a:solidFill>
-              <a:srgbClr val="1654CF"/>
-            </a:solidFill>
-          </a:ln>
-          <a:effectLst/>
-        </p:spPr>
-        <p:style>
-          <a:lnRef idx="1">
-            <a:schemeClr val="accent1"/>
-          </a:lnRef>
-          <a:fillRef idx="3">
-            <a:schemeClr val="accent1"/>
-          </a:fillRef>
-          <a:effectRef idx="2">
-            <a:schemeClr val="accent1"/>
-          </a:effectRef>
-          <a:fontRef idx="minor">
-            <a:schemeClr val="lt1"/>
-          </a:fontRef>
-        </p:style>
-        <p:txBody>
-          <a:bodyPr rtlCol="0" anchor="ctr"/>
-          <a:lstStyle/>
-          <a:p>
-            <a:pPr algn="ctr"/>
-          </a:p>
-        </p:txBody>
-      </p:sp>
-      <p:sp>
-        <p:nvSpPr>
-          <p:cNvPr id="77" name="Freeform 76"/>
-          <p:cNvSpPr/>
-          <p:nvPr/>
-        </p:nvSpPr>
-        <p:spPr>
-          <a:xfrm>
-            <a:off x="5953384" y="2588666"/>
-            <a:ext cx="90159" cy="0"/>
-          </a:xfrm>
-          <a:custGeom>
-            <a:avLst/>
-            <a:gdLst/>
-            <a:ahLst/>
-            <a:cxnLst/>
-            <a:rect l="l" t="t" r="r" b="b"/>
-            <a:pathLst>
-              <a:path w="90159" h="0">
-                <a:moveTo>
-                  <a:pt x="0" y="0"/>
-                </a:moveTo>
-                <a:lnTo>
-                  <a:pt x="90159" y="0"/>
-                </a:lnTo>
-              </a:path>
-            </a:pathLst>
-          </a:custGeom>
-          <a:noFill/>
-          <a:ln w="10160">
-            <a:solidFill>
-              <a:srgbClr val="1654CF"/>
-            </a:solidFill>
-          </a:ln>
-          <a:effectLst/>
-        </p:spPr>
-        <p:style>
-          <a:lnRef idx="1">
-            <a:schemeClr val="accent1"/>
-          </a:lnRef>
-          <a:fillRef idx="3">
-            <a:schemeClr val="accent1"/>
-          </a:fillRef>
-          <a:effectRef idx="2">
-            <a:schemeClr val="accent1"/>
-          </a:effectRef>
-          <a:fontRef idx="minor">
-            <a:schemeClr val="lt1"/>
-          </a:fontRef>
-        </p:style>
-        <p:txBody>
-          <a:bodyPr rtlCol="0" anchor="ctr"/>
-          <a:lstStyle/>
-          <a:p>
-            <a:pPr algn="ctr"/>
-          </a:p>
-        </p:txBody>
-      </p:sp>
-      <p:sp>
-        <p:nvSpPr>
-          <p:cNvPr id="78" name="TextBox 77"/>
-          <p:cNvSpPr txBox="1"/>
-          <p:nvPr/>
-        </p:nvSpPr>
-        <p:spPr>
-          <a:xfrm>
-            <a:off x="6263640" y="2322576"/>
-            <a:ext cx="4663440" cy="438912"/>
-          </a:xfrm>
-          <a:prstGeom prst="rect">
-            <a:avLst/>
-          </a:prstGeom>
-          <a:noFill/>
-        </p:spPr>
-        <p:txBody>
-          <a:bodyPr wrap="square" lIns="0" rIns="0" tIns="0" bIns="0" anchor="ctr">
-            <a:spAutoFit/>
-          </a:bodyPr>
-          <a:lstStyle/>
-          <a:p>
-            <a:pPr algn="l">
-              <a:spcAft>
-                <a:spcPts val="0"/>
-              </a:spcAft>
-            </a:pPr>
-            <a:r>
-              <a:rPr sz="950" b="0">
-                <a:solidFill>
-                  <a:srgbClr val="000000"/>
-                </a:solidFill>
-                <a:latin typeface="Aptos"/>
-              </a:rPr>
-              <a:t>Give transformation a clear mandate, visibility and accountability</a:t>
-            </a:r>
-          </a:p>
-        </p:txBody>
-      </p:sp>
-      <p:sp>
-        <p:nvSpPr>
-          <p:cNvPr id="79" name="Rounded Rectangle 78"/>
-          <p:cNvSpPr/>
-          <p:nvPr/>
-        </p:nvSpPr>
-        <p:spPr>
-          <a:xfrm>
-            <a:off x="2788920" y="1847088"/>
-            <a:ext cx="8595360" cy="438912"/>
-          </a:xfrm>
-          <a:prstGeom prst="roundRect">
-            <a:avLst>
-              <a:gd name="adj" fmla="val 16000"/>
-            </a:avLst>
-          </a:prstGeom>
-          <a:solidFill>
-            <a:srgbClr val="FFFFFF"/>
-          </a:solidFill>
-          <a:ln w="9525">
-            <a:solidFill>
-              <a:srgbClr val="C8D2DD"/>
-            </a:solidFill>
-          </a:ln>
-          <a:effectLst/>
-        </p:spPr>
-        <p:style>
-          <a:lnRef idx="1">
-            <a:schemeClr val="accent1"/>
-          </a:lnRef>
-          <a:fillRef idx="3">
-            <a:schemeClr val="accent1"/>
-          </a:fillRef>
-          <a:effectRef idx="2">
-            <a:schemeClr val="accent1"/>
-          </a:effectRef>
-          <a:fontRef idx="minor">
-            <a:schemeClr val="lt1"/>
-          </a:fontRef>
-        </p:style>
-        <p:txBody>
-          <a:bodyPr rtlCol="0" anchor="ctr" wrap="square"/>
-          <a:lstStyle/>
-          <a:p>
-            <a:pPr algn="ctr"/>
-          </a:p>
-        </p:txBody>
-      </p:sp>
-      <p:sp>
-        <p:nvSpPr>
-          <p:cNvPr id="80" name="Rounded Rectangle 79"/>
-          <p:cNvSpPr/>
-          <p:nvPr/>
-        </p:nvSpPr>
-        <p:spPr>
-          <a:xfrm>
-            <a:off x="2788920" y="1847088"/>
-            <a:ext cx="64008" cy="438912"/>
-          </a:xfrm>
-          <a:prstGeom prst="roundRect">
-            <a:avLst>
-              <a:gd name="adj" fmla="val 50000"/>
-            </a:avLst>
-          </a:prstGeom>
-          <a:solidFill>
-            <a:srgbClr val="0F5FDC"/>
-          </a:solidFill>
-          <a:ln>
-            <a:noFill/>
-          </a:ln>
-          <a:effectLst/>
-        </p:spPr>
-        <p:style>
-          <a:lnRef idx="1">
-            <a:schemeClr val="accent1"/>
-          </a:lnRef>
-          <a:fillRef idx="3">
-            <a:schemeClr val="accent1"/>
-          </a:fillRef>
-          <a:effectRef idx="2">
-            <a:schemeClr val="accent1"/>
-          </a:effectRef>
-          <a:fontRef idx="minor">
-            <a:schemeClr val="lt1"/>
-          </a:fontRef>
-        </p:style>
-        <p:txBody>
-          <a:bodyPr rtlCol="0" anchor="ctr" wrap="square"/>
-          <a:lstStyle/>
-          <a:p>
-            <a:pPr algn="ctr"/>
-          </a:p>
-        </p:txBody>
-      </p:sp>
-      <p:sp>
-        <p:nvSpPr>
-          <p:cNvPr id="81" name="Oval 80"/>
-          <p:cNvSpPr/>
-          <p:nvPr/>
-        </p:nvSpPr>
-        <p:spPr>
-          <a:xfrm>
-            <a:off x="2953512" y="1911095"/>
-            <a:ext cx="310896" cy="310896"/>
-          </a:xfrm>
-          <a:prstGeom prst="ellipse">
-            <a:avLst/>
-          </a:prstGeom>
-          <a:solidFill>
-            <a:srgbClr val="0F5FDC"/>
-          </a:solidFill>
-          <a:ln>
-            <a:noFill/>
-          </a:ln>
-          <a:effectLst/>
-        </p:spPr>
-        <p:style>
-          <a:lnRef idx="1">
-            <a:schemeClr val="accent1"/>
-          </a:lnRef>
-          <a:fillRef idx="3">
-            <a:schemeClr val="accent1"/>
-          </a:fillRef>
-          <a:effectRef idx="2">
-            <a:schemeClr val="accent1"/>
-          </a:effectRef>
-          <a:fontRef idx="minor">
-            <a:schemeClr val="lt1"/>
-          </a:fontRef>
-        </p:style>
-        <p:txBody>
-          <a:bodyPr rtlCol="0" anchor="ctr" wrap="square" lIns="54864" rIns="54864" tIns="0" bIns="0"/>
-          <a:lstStyle/>
-          <a:p>
-            <a:pPr algn="ctr">
-              <a:lnSpc>
-                <a:spcPct val="98000"/>
-              </a:lnSpc>
-              <a:spcAft>
-                <a:spcPts val="0"/>
-              </a:spcAft>
-            </a:pPr>
-            <a:r>
-              <a:rPr sz="1200" b="1">
-                <a:solidFill>
-                  <a:srgbClr val="FFFFFF"/>
-                </a:solidFill>
-                <a:latin typeface="Aptos"/>
-              </a:rPr>
-              <a:t>8</a:t>
-            </a:r>
-          </a:p>
-        </p:txBody>
-      </p:sp>
-      <p:sp>
-        <p:nvSpPr>
-          <p:cNvPr id="82" name="TextBox 81"/>
-          <p:cNvSpPr txBox="1"/>
-          <p:nvPr/>
-        </p:nvSpPr>
-        <p:spPr>
-          <a:xfrm>
-            <a:off x="3374136" y="1847088"/>
-            <a:ext cx="2560320" cy="438912"/>
-          </a:xfrm>
-          <a:prstGeom prst="rect">
-            <a:avLst/>
-          </a:prstGeom>
-          <a:noFill/>
-        </p:spPr>
-        <p:txBody>
-          <a:bodyPr wrap="square" lIns="0" rIns="0" tIns="0" bIns="0" anchor="ctr">
-            <a:spAutoFit/>
-          </a:bodyPr>
-          <a:lstStyle/>
-          <a:p>
-            <a:pPr algn="l">
-              <a:spcAft>
-                <a:spcPts val="0"/>
-              </a:spcAft>
-            </a:pPr>
-            <a:r>
-              <a:rPr sz="1050" b="1">
-                <a:solidFill>
-                  <a:srgbClr val="0F5FDC"/>
-                </a:solidFill>
-                <a:latin typeface="Aptos"/>
-              </a:rPr>
-              <a:t>VDUs — customer alignment</a:t>
-            </a:r>
-          </a:p>
-        </p:txBody>
-      </p:sp>
-      <p:sp>
-        <p:nvSpPr>
-          <p:cNvPr id="83" name="Freeform 82"/>
-          <p:cNvSpPr/>
-          <p:nvPr/>
-        </p:nvSpPr>
-        <p:spPr>
-          <a:xfrm>
-            <a:off x="5989320" y="1938528"/>
-            <a:ext cx="0" cy="256032"/>
-          </a:xfrm>
-          <a:custGeom>
-            <a:avLst/>
-            <a:gdLst/>
-            <a:ahLst/>
-            <a:cxnLst/>
-            <a:rect l="l" t="t" r="r" b="b"/>
-            <a:pathLst>
-              <a:path w="0" h="256032">
-                <a:moveTo>
-                  <a:pt x="0" y="0"/>
-                </a:moveTo>
-                <a:lnTo>
-                  <a:pt x="0" y="256032"/>
-                </a:lnTo>
-              </a:path>
-            </a:pathLst>
-          </a:custGeom>
-          <a:noFill/>
-          <a:ln w="9525">
-            <a:solidFill>
-              <a:srgbClr val="C8D2DD"/>
-            </a:solidFill>
-          </a:ln>
-          <a:effectLst/>
-        </p:spPr>
-        <p:style>
-          <a:lnRef idx="1">
-            <a:schemeClr val="accent1"/>
-          </a:lnRef>
-          <a:fillRef idx="3">
-            <a:schemeClr val="accent1"/>
-          </a:fillRef>
-          <a:effectRef idx="2">
-            <a:schemeClr val="accent1"/>
-          </a:effectRef>
-          <a:fontRef idx="minor">
-            <a:schemeClr val="lt1"/>
-          </a:fontRef>
-        </p:style>
-        <p:txBody>
-          <a:bodyPr rtlCol="0" anchor="ctr"/>
-          <a:lstStyle/>
-          <a:p>
-            <a:pPr algn="ctr"/>
-          </a:p>
-        </p:txBody>
-      </p:sp>
-      <p:sp>
-        <p:nvSpPr>
-          <p:cNvPr id="84" name="Oval 83"/>
-          <p:cNvSpPr/>
-          <p:nvPr/>
-        </p:nvSpPr>
-        <p:spPr>
-          <a:xfrm>
-            <a:off x="6135624" y="1929384"/>
-            <a:ext cx="274320" cy="274320"/>
-          </a:xfrm>
-          <a:prstGeom prst="ellipse">
-            <a:avLst/>
-          </a:prstGeom>
-          <a:solidFill>
-            <a:srgbClr val="FFFFFF"/>
-          </a:solidFill>
-          <a:ln w="9525">
-            <a:solidFill>
-              <a:srgbClr val="C8D2DD"/>
-            </a:solidFill>
-          </a:ln>
-          <a:effectLst/>
-        </p:spPr>
-        <p:style>
-          <a:lnRef idx="1">
-            <a:schemeClr val="accent1"/>
-          </a:lnRef>
-          <a:fillRef idx="3">
-            <a:schemeClr val="accent1"/>
-          </a:fillRef>
-          <a:effectRef idx="2">
-            <a:schemeClr val="accent1"/>
-          </a:effectRef>
-          <a:fontRef idx="minor">
-            <a:schemeClr val="lt1"/>
-          </a:fontRef>
-        </p:style>
-        <p:txBody>
-          <a:bodyPr rtlCol="0" anchor="ctr" wrap="square"/>
-          <a:lstStyle/>
-          <a:p>
-            <a:pPr algn="ctr"/>
-          </a:p>
-        </p:txBody>
-      </p:sp>
-      <p:sp>
-        <p:nvSpPr>
-          <p:cNvPr id="85" name="5-Point Star 84"/>
-          <p:cNvSpPr/>
-          <p:nvPr/>
-        </p:nvSpPr>
-        <p:spPr>
-          <a:xfrm>
-            <a:off x="6198168" y="1991928"/>
-            <a:ext cx="149230" cy="149230"/>
-          </a:xfrm>
-          <a:prstGeom prst="star5">
-            <a:avLst/>
-          </a:prstGeom>
-          <a:noFill/>
-          <a:ln w="12700">
-            <a:solidFill>
-              <a:srgbClr val="0F5FDC"/>
-            </a:solidFill>
-          </a:ln>
-          <a:effectLst/>
-        </p:spPr>
-        <p:style>
-          <a:lnRef idx="1">
-            <a:schemeClr val="accent1"/>
-          </a:lnRef>
-          <a:fillRef idx="3">
-            <a:schemeClr val="accent1"/>
-          </a:fillRef>
-          <a:effectRef idx="2">
-            <a:schemeClr val="accent1"/>
-          </a:effectRef>
-          <a:fontRef idx="minor">
-            <a:schemeClr val="lt1"/>
-          </a:fontRef>
-        </p:style>
-        <p:txBody>
-          <a:bodyPr rtlCol="0" anchor="ctr" wrap="square"/>
-          <a:lstStyle/>
-          <a:p>
-            <a:pPr algn="ctr"/>
-          </a:p>
-        </p:txBody>
-      </p:sp>
-      <p:sp>
-        <p:nvSpPr>
-          <p:cNvPr id="86" name="TextBox 85"/>
-          <p:cNvSpPr txBox="1"/>
-          <p:nvPr/>
-        </p:nvSpPr>
-        <p:spPr>
-          <a:xfrm>
-            <a:off x="6537959" y="1847088"/>
-            <a:ext cx="4663440" cy="438912"/>
-          </a:xfrm>
-          <a:prstGeom prst="rect">
-            <a:avLst/>
-          </a:prstGeom>
-          <a:noFill/>
-        </p:spPr>
-        <p:txBody>
-          <a:bodyPr wrap="square" lIns="0" rIns="0" tIns="0" bIns="0" anchor="ctr">
-            <a:spAutoFit/>
-          </a:bodyPr>
-          <a:lstStyle/>
-          <a:p>
-            <a:pPr algn="l">
-              <a:spcAft>
-                <a:spcPts val="0"/>
-              </a:spcAft>
-            </a:pPr>
-            <a:r>
-              <a:rPr sz="950" b="0">
-                <a:solidFill>
-                  <a:srgbClr val="000000"/>
-                </a:solidFill>
-                <a:latin typeface="Aptos"/>
-              </a:rPr>
-              <a:t>Align delivery units to customer outcomes and expectations</a:t>
-            </a:r>
-          </a:p>
-        </p:txBody>
-      </p:sp>
-      <p:sp>
-        <p:nvSpPr>
-          <p:cNvPr id="87" name="Rounded Rectangle 86"/>
-          <p:cNvSpPr/>
-          <p:nvPr/>
-        </p:nvSpPr>
-        <p:spPr>
-          <a:xfrm>
-            <a:off x="621792" y="1883664"/>
-            <a:ext cx="64008" cy="329184"/>
-          </a:xfrm>
-          <a:prstGeom prst="roundRect">
-            <a:avLst>
-              <a:gd name="adj" fmla="val 50000"/>
-            </a:avLst>
-          </a:prstGeom>
-          <a:solidFill>
-            <a:srgbClr val="5F1EBE"/>
-          </a:solidFill>
-          <a:ln>
-            <a:noFill/>
-          </a:ln>
-          <a:effectLst/>
-        </p:spPr>
-        <p:style>
-          <a:lnRef idx="1">
-            <a:schemeClr val="accent1"/>
-          </a:lnRef>
-          <a:fillRef idx="3">
-            <a:schemeClr val="accent1"/>
-          </a:fillRef>
-          <a:effectRef idx="2">
-            <a:schemeClr val="accent1"/>
-          </a:effectRef>
-          <a:fontRef idx="minor">
-            <a:schemeClr val="lt1"/>
-          </a:fontRef>
-        </p:style>
-        <p:txBody>
-          <a:bodyPr rtlCol="0" anchor="ctr" wrap="square"/>
-          <a:lstStyle/>
-          <a:p>
-            <a:pPr algn="ctr"/>
-          </a:p>
-        </p:txBody>
-      </p:sp>
-      <p:sp>
-        <p:nvSpPr>
-          <p:cNvPr id="88" name="TextBox 87"/>
-          <p:cNvSpPr txBox="1"/>
-          <p:nvPr/>
-        </p:nvSpPr>
-        <p:spPr>
-          <a:xfrm>
-            <a:off x="822960" y="1883664"/>
-            <a:ext cx="1828800" cy="329184"/>
-          </a:xfrm>
-          <a:prstGeom prst="rect">
-            <a:avLst/>
-          </a:prstGeom>
-          <a:noFill/>
-        </p:spPr>
-        <p:txBody>
-          <a:bodyPr wrap="square" lIns="0" rIns="0" tIns="0" bIns="0" anchor="t">
-            <a:spAutoFit/>
-          </a:bodyPr>
-          <a:lstStyle/>
-          <a:p>
-            <a:pPr algn="l">
-              <a:lnSpc>
-                <a:spcPct val="105000"/>
-              </a:lnSpc>
-              <a:spcAft>
-                <a:spcPts val="0"/>
-              </a:spcAft>
-            </a:pPr>
-            <a:r>
-              <a:rPr sz="1100" b="1">
-                <a:solidFill>
-                  <a:srgbClr val="411482"/>
-                </a:solidFill>
-                <a:latin typeface="Aptos"/>
-              </a:rPr>
-              <a:t>STRONG TODAY.</a:t>
-            </a:r>
-          </a:p>
-          <a:p>
-            <a:pPr algn="l">
-              <a:lnSpc>
-                <a:spcPct val="105000"/>
-              </a:lnSpc>
-              <a:spcAft>
-                <a:spcPts val="0"/>
-              </a:spcAft>
-            </a:pPr>
-            <a:r>
-              <a:rPr sz="1100" b="1">
-                <a:solidFill>
-                  <a:srgbClr val="411482"/>
-                </a:solidFill>
-                <a:latin typeface="Aptos"/>
-              </a:rPr>
-              <a:t>READY TOMORROW.</a:t>
-            </a:r>
-          </a:p>
-        </p:txBody>
-      </p:sp>
-      <p:sp>
-        <p:nvSpPr>
-          <p:cNvPr id="89" name="TextBox 88"/>
-          <p:cNvSpPr txBox="1"/>
-          <p:nvPr/>
-        </p:nvSpPr>
-        <p:spPr>
-          <a:xfrm>
-            <a:off x="822960" y="2304288"/>
-            <a:ext cx="1536192" cy="438912"/>
-          </a:xfrm>
-          <a:prstGeom prst="rect">
-            <a:avLst/>
-          </a:prstGeom>
-          <a:noFill/>
-        </p:spPr>
-        <p:txBody>
-          <a:bodyPr wrap="square" lIns="0" rIns="0" tIns="0" bIns="0" anchor="t">
-            <a:spAutoFit/>
-          </a:bodyPr>
-          <a:lstStyle/>
-          <a:p>
-            <a:pPr algn="l">
-              <a:lnSpc>
-                <a:spcPct val="115000"/>
-              </a:lnSpc>
-              <a:spcAft>
-                <a:spcPts val="0"/>
-              </a:spcAft>
-            </a:pPr>
-            <a:r>
-              <a:rPr sz="900" b="0">
-                <a:solidFill>
-                  <a:srgbClr val="8291A0"/>
-                </a:solidFill>
-                <a:latin typeface="Aptos"/>
-              </a:rPr>
-              <a:t>A solid foundation enables confident, sustainable scale.</a:t>
-            </a:r>
-          </a:p>
-        </p:txBody>
-      </p:sp>
-      <p:sp>
-        <p:nvSpPr>
-          <p:cNvPr id="90" name="Rounded Rectangle 89"/>
-          <p:cNvSpPr/>
-          <p:nvPr/>
-        </p:nvSpPr>
-        <p:spPr>
-          <a:xfrm>
-            <a:off x="594360" y="5779008"/>
-            <a:ext cx="11000232" cy="585216"/>
+            <a:off x="594360" y="5687568"/>
+            <a:ext cx="11000232" cy="566928"/>
           </a:xfrm>
           <a:prstGeom prst="roundRect">
             <a:avLst>
@@ -6445,13 +5146,13 @@
       </p:sp>
       <p:sp>
         <p:nvSpPr>
-          <p:cNvPr id="91" name="Oval 90"/>
+          <p:cNvPr id="62" name="Oval 61"/>
           <p:cNvSpPr/>
           <p:nvPr/>
         </p:nvSpPr>
         <p:spPr>
           <a:xfrm>
-            <a:off x="932688" y="5916168"/>
+            <a:off x="932688" y="5815584"/>
             <a:ext cx="310896" cy="310896"/>
           </a:xfrm>
           <a:prstGeom prst="ellipse">
@@ -6489,13 +5190,13 @@
       </p:sp>
       <p:sp>
         <p:nvSpPr>
-          <p:cNvPr id="92" name="Freeform 91"/>
+          <p:cNvPr id="63" name="Freeform 62"/>
           <p:cNvSpPr/>
           <p:nvPr/>
         </p:nvSpPr>
         <p:spPr>
           <a:xfrm>
-            <a:off x="1018641" y="5988222"/>
+            <a:off x="1018641" y="5887638"/>
             <a:ext cx="138989" cy="173736"/>
           </a:xfrm>
           <a:custGeom>
@@ -6557,14 +5258,14 @@
       </p:sp>
       <p:sp>
         <p:nvSpPr>
-          <p:cNvPr id="93" name="TextBox 92"/>
+          <p:cNvPr id="64" name="TextBox 63"/>
           <p:cNvSpPr txBox="1"/>
           <p:nvPr/>
         </p:nvSpPr>
         <p:spPr>
           <a:xfrm>
-            <a:off x="1426464" y="5779008"/>
-            <a:ext cx="9875520" cy="585216"/>
+            <a:off x="1426464" y="5687568"/>
+            <a:ext cx="9875520" cy="566928"/>
           </a:xfrm>
           <a:prstGeom prst="rect">
             <a:avLst/>
